--- a/poster-slides/templates/42x42_square_poster.pptx
+++ b/poster-slides/templates/42x42_square_poster.pptx
@@ -6649,6 +6649,90 @@
           <a:chExt cx="0" cy="0"/>
         </a:xfrm>
       </p:grpSpPr>
+      <p:sp>
+        <p:nvSpPr>
+          <p:cNvPr id="2" name="Accessible slide title"/>
+          <p:cNvSpPr/>
+          <p:nvPr>
+            <p:ph type="title"/>
+          </p:nvPr>
+        </p:nvSpPr>
+        <p:spPr>
+          <a:xfrm>
+            <a:off x="0" y="-914400"/>
+            <a:ext cx="20000000" cy="457200"/>
+          </a:xfrm>
+          <a:noFill/>
+        </p:spPr>
+        <p:txBody>
+          <a:bodyPr/>
+          <a:lstStyle/>
+          <a:p>
+            <a:r>
+              <a:rPr lang="en-US" sz="2000"/>
+              <a:t>42x42 square poster template — instructions</a:t>
+            </a:r>
+          </a:p>
+        </p:txBody>
+      </p:sp>
+      <p:sp>
+        <p:nvSpPr>
+          <p:cNvPr id="3" name="Template instructions — accessible text equivalent"/>
+          <p:cNvSpPr/>
+          <p:nvPr/>
+        </p:nvSpPr>
+        <p:spPr>
+          <a:xfrm>
+            <a:off x="0" y="-20000000"/>
+            <a:ext cx="20000000" cy="18000000"/>
+          </a:xfrm>
+          <a:noFill/>
+        </p:spPr>
+        <p:txBody>
+          <a:bodyPr/>
+          <a:lstStyle/>
+          <a:p>
+            <a:r>
+              <a:t>This template is inspired by the #evenbetterpostertemplate and work by the MIT-BECL lab. </a:t>
+            </a:r>
+          </a:p>
+          <a:p>
+            <a:r>
+              <a:t>This default font for this template is Atkinson Hyperlegible which is designed to be accessible for low-vision readers. You may need to download and install the font on your device. Or you can select a font that is compatible with all Microsoft office products. </a:t>
+            </a:r>
+          </a:p>
+          <a:p>
+            <a:r>
+              <a:t>UNL’s color pallet is built into the template color theme.</a:t>
+            </a:r>
+          </a:p>
+          <a:p>
+            <a:r>
+              <a:t>You can change the background color in the Slide Master. </a:t>
+            </a:r>
+          </a:p>
+          <a:p>
+            <a:r>
+              <a:t>You also need to make your own QRC code or delete it on the Slide Master. </a:t>
+            </a:r>
+          </a:p>
+          <a:p>
+            <a:r>
+              <a:t>When inserting a graph, chart, table, etc., it will automatically be styled according to brand standards. To adjust colors, use the built-in color theme.</a:t>
+            </a:r>
+          </a:p>
+          <a:p>
+            <a:r>
+              <a:t>You can copy and paste UNL’s Law-Psych Program &amp; University logos from here below.</a:t>
+            </a:r>
+          </a:p>
+          <a:p>
+            <a:r>
+              <a:t>This slide is just for context and to help you use the template.</a:t>
+            </a:r>
+          </a:p>
+        </p:txBody>
+      </p:sp>
     </p:spTree>
     <p:extLst>
       <p:ext uri="{BB962C8B-B14F-4D97-AF65-F5344CB8AC3E}">
@@ -6681,7 +6765,33 @@
       </p:grpSpPr>
       <p:sp>
         <p:nvSpPr>
-          <p:cNvPr id="2" name="Picture Placeholder 1">
+          <p:cNvPr id="4" name="Accessible slide title"/>
+          <p:cNvSpPr/>
+          <p:nvPr>
+            <p:ph type="title"/>
+          </p:nvPr>
+        </p:nvSpPr>
+        <p:spPr>
+          <a:xfrm>
+            <a:off x="0" y="-914400"/>
+            <a:ext cx="20000000" cy="457200"/>
+          </a:xfrm>
+          <a:noFill/>
+        </p:spPr>
+        <p:txBody>
+          <a:bodyPr/>
+          <a:lstStyle/>
+          <a:p>
+            <a:r>
+              <a:rPr lang="en-US" sz="2000"/>
+              <a:t>42x42 square poster template — layout 1</a:t>
+            </a:r>
+          </a:p>
+        </p:txBody>
+      </p:sp>
+      <p:sp>
+        <p:nvSpPr>
+          <p:cNvPr id="2" name="Institution logo(s)">
             <a:extLst>
               <a:ext uri="{FF2B5EF4-FFF2-40B4-BE49-F238E27FC236}">
                 <a16:creationId xmlns:a16="http://schemas.microsoft.com/office/drawing/2014/main" id="{874CD531-9B20-7909-061F-8C1CF35112FB}"/>
@@ -6706,7 +6816,7 @@
       </p:sp>
       <p:sp>
         <p:nvSpPr>
-          <p:cNvPr id="3" name="Text Placeholder 2">
+          <p:cNvPr id="3" name="Authors: 60pt">
             <a:extLst>
               <a:ext uri="{FF2B5EF4-FFF2-40B4-BE49-F238E27FC236}">
                 <a16:creationId xmlns:a16="http://schemas.microsoft.com/office/drawing/2014/main" id="{0A4D53D0-0DD1-A55E-D31A-4A7422188155}"/>
@@ -6761,7 +6871,110 @@
       </p:grpSpPr>
       <p:sp>
         <p:nvSpPr>
-          <p:cNvPr id="2" name="Text Placeholder 1">
+          <p:cNvPr id="14" name="Title 13">
+            <a:extLst>
+              <a:ext uri="{FF2B5EF4-FFF2-40B4-BE49-F238E27FC236}">
+                <a16:creationId xmlns:a16="http://schemas.microsoft.com/office/drawing/2014/main" id="{D415BC36-8B19-DD78-D8F2-63C1A369AB6A}"/>
+              </a:ext>
+            </a:extLst>
+          </p:cNvPr>
+          <p:cNvSpPr>
+            <a:spLocks noGrp="1"/>
+          </p:cNvSpPr>
+          <p:nvPr>
+            <p:ph type="title"/>
+          </p:nvPr>
+        </p:nvSpPr>
+        <p:spPr/>
+        <p:txBody>
+          <a:bodyPr/>
+          <a:lstStyle/>
+          <a:p>
+            <a:r>
+              <a:rPr lang="en-US"/>
+              <a:t>42x42 square poster template — layout 2</a:t>
+            </a:r>
+          </a:p>
+        </p:txBody>
+      </p:sp>
+      <p:sp>
+        <p:nvSpPr>
+          <p:cNvPr id="16" name="Institution logo(s)">
+            <a:extLst>
+              <a:ext uri="{FF2B5EF4-FFF2-40B4-BE49-F238E27FC236}">
+                <a16:creationId xmlns:a16="http://schemas.microsoft.com/office/drawing/2014/main" id="{DEC12799-8F85-1177-362B-7117A90551D8}"/>
+              </a:ext>
+            </a:extLst>
+          </p:cNvPr>
+          <p:cNvSpPr>
+            <a:spLocks noGrp="1"/>
+          </p:cNvSpPr>
+          <p:nvPr>
+            <p:ph type="pic" sz="quarter" idx="23"/>
+          </p:nvPr>
+        </p:nvSpPr>
+        <p:spPr/>
+        <p:txBody>
+          <a:bodyPr/>
+          <a:lstStyle/>
+          <a:p>
+            <a:endParaRPr lang="en-US"/>
+          </a:p>
+        </p:txBody>
+      </p:sp>
+      <p:sp>
+        <p:nvSpPr>
+          <p:cNvPr id="15" name="Authors: 60pt">
+            <a:extLst>
+              <a:ext uri="{FF2B5EF4-FFF2-40B4-BE49-F238E27FC236}">
+                <a16:creationId xmlns:a16="http://schemas.microsoft.com/office/drawing/2014/main" id="{ACB8BB2A-0A54-38CA-4216-1D4F39E8981C}"/>
+              </a:ext>
+            </a:extLst>
+          </p:cNvPr>
+          <p:cNvSpPr>
+            <a:spLocks noGrp="1"/>
+          </p:cNvSpPr>
+          <p:nvPr>
+            <p:ph type="body" sz="quarter" idx="21"/>
+          </p:nvPr>
+        </p:nvSpPr>
+        <p:spPr/>
+        <p:txBody>
+          <a:bodyPr/>
+          <a:lstStyle/>
+          <a:p>
+            <a:endParaRPr lang="en-US"/>
+          </a:p>
+        </p:txBody>
+      </p:sp>
+      <p:sp>
+        <p:nvSpPr>
+          <p:cNvPr id="9" name="Insert content here: 36pt">
+            <a:extLst>
+              <a:ext uri="{FF2B5EF4-FFF2-40B4-BE49-F238E27FC236}">
+                <a16:creationId xmlns:a16="http://schemas.microsoft.com/office/drawing/2014/main" id="{CE9E7FB8-627B-8B20-8708-0CF9A20FC919}"/>
+              </a:ext>
+            </a:extLst>
+          </p:cNvPr>
+          <p:cNvSpPr>
+            <a:spLocks noGrp="1"/>
+          </p:cNvSpPr>
+          <p:nvPr>
+            <p:ph type="body" sz="quarter" idx="44"/>
+          </p:nvPr>
+        </p:nvSpPr>
+        <p:spPr/>
+        <p:txBody>
+          <a:bodyPr/>
+          <a:lstStyle/>
+          <a:p>
+            <a:endParaRPr lang="en-US"/>
+          </a:p>
+        </p:txBody>
+      </p:sp>
+      <p:sp>
+        <p:nvSpPr>
+          <p:cNvPr id="2" name="Insert content here: 36pt">
             <a:extLst>
               <a:ext uri="{FF2B5EF4-FFF2-40B4-BE49-F238E27FC236}">
                 <a16:creationId xmlns:a16="http://schemas.microsoft.com/office/drawing/2014/main" id="{F7E547B1-8B47-4549-FBB4-D80267676719}"/>
@@ -6786,7 +6999,7 @@
       </p:sp>
       <p:sp>
         <p:nvSpPr>
-          <p:cNvPr id="3" name="Text Placeholder 2">
+          <p:cNvPr id="3" name="Insert content here: 36pt">
             <a:extLst>
               <a:ext uri="{FF2B5EF4-FFF2-40B4-BE49-F238E27FC236}">
                 <a16:creationId xmlns:a16="http://schemas.microsoft.com/office/drawing/2014/main" id="{D61208A3-F416-C0B5-35C0-454CF7B4BF91}"/>
@@ -6811,7 +7024,32 @@
       </p:sp>
       <p:sp>
         <p:nvSpPr>
-          <p:cNvPr id="4" name="Text Placeholder 3">
+          <p:cNvPr id="11" name="Insert content here: 36pt">
+            <a:extLst>
+              <a:ext uri="{FF2B5EF4-FFF2-40B4-BE49-F238E27FC236}">
+                <a16:creationId xmlns:a16="http://schemas.microsoft.com/office/drawing/2014/main" id="{9548F700-753B-0934-722C-AAC5355A58C1}"/>
+              </a:ext>
+            </a:extLst>
+          </p:cNvPr>
+          <p:cNvSpPr>
+            <a:spLocks noGrp="1"/>
+          </p:cNvSpPr>
+          <p:nvPr>
+            <p:ph type="body" sz="quarter" idx="46"/>
+          </p:nvPr>
+        </p:nvSpPr>
+        <p:spPr/>
+        <p:txBody>
+          <a:bodyPr/>
+          <a:lstStyle/>
+          <a:p>
+            <a:endParaRPr lang="en-US"/>
+          </a:p>
+        </p:txBody>
+      </p:sp>
+      <p:sp>
+        <p:nvSpPr>
+          <p:cNvPr id="4" name="Insert content here: 36pt">
             <a:extLst>
               <a:ext uri="{FF2B5EF4-FFF2-40B4-BE49-F238E27FC236}">
                 <a16:creationId xmlns:a16="http://schemas.microsoft.com/office/drawing/2014/main" id="{DD2B43E9-285B-F57A-9431-9300196B7E1E}"/>
@@ -6836,7 +7074,107 @@
       </p:sp>
       <p:sp>
         <p:nvSpPr>
-          <p:cNvPr id="5" name="Text Placeholder 4">
+          <p:cNvPr id="13" name="Insert content here: 36pt">
+            <a:extLst>
+              <a:ext uri="{FF2B5EF4-FFF2-40B4-BE49-F238E27FC236}">
+                <a16:creationId xmlns:a16="http://schemas.microsoft.com/office/drawing/2014/main" id="{34F49654-F25C-F07C-054D-3AAD9E957B7B}"/>
+              </a:ext>
+            </a:extLst>
+          </p:cNvPr>
+          <p:cNvSpPr>
+            <a:spLocks noGrp="1"/>
+          </p:cNvSpPr>
+          <p:nvPr>
+            <p:ph type="body" sz="quarter" idx="48"/>
+          </p:nvPr>
+        </p:nvSpPr>
+        <p:spPr/>
+        <p:txBody>
+          <a:bodyPr/>
+          <a:lstStyle/>
+          <a:p>
+            <a:endParaRPr lang="en-US"/>
+          </a:p>
+        </p:txBody>
+      </p:sp>
+      <p:sp>
+        <p:nvSpPr>
+          <p:cNvPr id="6" name="Insert content here: 36pt">
+            <a:extLst>
+              <a:ext uri="{FF2B5EF4-FFF2-40B4-BE49-F238E27FC236}">
+                <a16:creationId xmlns:a16="http://schemas.microsoft.com/office/drawing/2014/main" id="{CC4369D4-943F-9EC4-5645-E3C5789CF515}"/>
+              </a:ext>
+            </a:extLst>
+          </p:cNvPr>
+          <p:cNvSpPr>
+            <a:spLocks noGrp="1"/>
+          </p:cNvSpPr>
+          <p:nvPr>
+            <p:ph type="body" sz="quarter" idx="39"/>
+          </p:nvPr>
+        </p:nvSpPr>
+        <p:spPr/>
+        <p:txBody>
+          <a:bodyPr/>
+          <a:lstStyle/>
+          <a:p>
+            <a:endParaRPr lang="en-US"/>
+          </a:p>
+        </p:txBody>
+      </p:sp>
+      <p:sp>
+        <p:nvSpPr>
+          <p:cNvPr id="8" name="Insert content here: 36pt">
+            <a:extLst>
+              <a:ext uri="{FF2B5EF4-FFF2-40B4-BE49-F238E27FC236}">
+                <a16:creationId xmlns:a16="http://schemas.microsoft.com/office/drawing/2014/main" id="{81F3AEE0-9FD7-542B-9C9D-D08E82530226}"/>
+              </a:ext>
+            </a:extLst>
+          </p:cNvPr>
+          <p:cNvSpPr>
+            <a:spLocks noGrp="1"/>
+          </p:cNvSpPr>
+          <p:nvPr>
+            <p:ph type="body" sz="quarter" idx="42"/>
+          </p:nvPr>
+        </p:nvSpPr>
+        <p:spPr/>
+        <p:txBody>
+          <a:bodyPr/>
+          <a:lstStyle/>
+          <a:p>
+            <a:endParaRPr lang="en-US"/>
+          </a:p>
+        </p:txBody>
+      </p:sp>
+      <p:sp>
+        <p:nvSpPr>
+          <p:cNvPr id="12" name="Insert content here: 36pt">
+            <a:extLst>
+              <a:ext uri="{FF2B5EF4-FFF2-40B4-BE49-F238E27FC236}">
+                <a16:creationId xmlns:a16="http://schemas.microsoft.com/office/drawing/2014/main" id="{AEEE17DD-1249-2575-20C5-978FFE645E54}"/>
+              </a:ext>
+            </a:extLst>
+          </p:cNvPr>
+          <p:cNvSpPr>
+            <a:spLocks noGrp="1"/>
+          </p:cNvSpPr>
+          <p:nvPr>
+            <p:ph type="body" sz="quarter" idx="47"/>
+          </p:nvPr>
+        </p:nvSpPr>
+        <p:spPr/>
+        <p:txBody>
+          <a:bodyPr/>
+          <a:lstStyle/>
+          <a:p>
+            <a:endParaRPr lang="en-US"/>
+          </a:p>
+        </p:txBody>
+      </p:sp>
+      <p:sp>
+        <p:nvSpPr>
+          <p:cNvPr id="5" name="Insert content here: 36pt">
             <a:extLst>
               <a:ext uri="{FF2B5EF4-FFF2-40B4-BE49-F238E27FC236}">
                 <a16:creationId xmlns:a16="http://schemas.microsoft.com/office/drawing/2014/main" id="{F0255793-742C-38A6-75D5-518E3E6C8D55}"/>
@@ -6861,18 +7199,18 @@
       </p:sp>
       <p:sp>
         <p:nvSpPr>
-          <p:cNvPr id="6" name="Text Placeholder 5">
-            <a:extLst>
-              <a:ext uri="{FF2B5EF4-FFF2-40B4-BE49-F238E27FC236}">
-                <a16:creationId xmlns:a16="http://schemas.microsoft.com/office/drawing/2014/main" id="{CC4369D4-943F-9EC4-5645-E3C5789CF515}"/>
-              </a:ext>
-            </a:extLst>
-          </p:cNvPr>
-          <p:cNvSpPr>
-            <a:spLocks noGrp="1"/>
-          </p:cNvSpPr>
-          <p:nvPr>
-            <p:ph type="body" sz="quarter" idx="39"/>
+          <p:cNvPr id="10" name="Insert content here: 36pt">
+            <a:extLst>
+              <a:ext uri="{FF2B5EF4-FFF2-40B4-BE49-F238E27FC236}">
+                <a16:creationId xmlns:a16="http://schemas.microsoft.com/office/drawing/2014/main" id="{42FE9062-8B03-CF28-30AC-9CB7ACCDCCD9}"/>
+              </a:ext>
+            </a:extLst>
+          </p:cNvPr>
+          <p:cNvSpPr>
+            <a:spLocks noGrp="1"/>
+          </p:cNvSpPr>
+          <p:nvPr>
+            <p:ph type="body" sz="quarter" idx="45"/>
           </p:nvPr>
         </p:nvSpPr>
         <p:spPr/>
@@ -6886,7 +7224,7 @@
       </p:sp>
       <p:sp>
         <p:nvSpPr>
-          <p:cNvPr id="7" name="Text Placeholder 6">
+          <p:cNvPr id="7" name="Insert content here: 36pt">
             <a:extLst>
               <a:ext uri="{FF2B5EF4-FFF2-40B4-BE49-F238E27FC236}">
                 <a16:creationId xmlns:a16="http://schemas.microsoft.com/office/drawing/2014/main" id="{61BA208C-79B8-6ECD-672A-C47EB737AE47}"/>
@@ -6898,231 +7236,6 @@
           </p:cNvSpPr>
           <p:nvPr>
             <p:ph type="body" sz="quarter" idx="40"/>
-          </p:nvPr>
-        </p:nvSpPr>
-        <p:spPr/>
-        <p:txBody>
-          <a:bodyPr/>
-          <a:lstStyle/>
-          <a:p>
-            <a:endParaRPr lang="en-US"/>
-          </a:p>
-        </p:txBody>
-      </p:sp>
-      <p:sp>
-        <p:nvSpPr>
-          <p:cNvPr id="8" name="Text Placeholder 7">
-            <a:extLst>
-              <a:ext uri="{FF2B5EF4-FFF2-40B4-BE49-F238E27FC236}">
-                <a16:creationId xmlns:a16="http://schemas.microsoft.com/office/drawing/2014/main" id="{81F3AEE0-9FD7-542B-9C9D-D08E82530226}"/>
-              </a:ext>
-            </a:extLst>
-          </p:cNvPr>
-          <p:cNvSpPr>
-            <a:spLocks noGrp="1"/>
-          </p:cNvSpPr>
-          <p:nvPr>
-            <p:ph type="body" sz="quarter" idx="42"/>
-          </p:nvPr>
-        </p:nvSpPr>
-        <p:spPr/>
-        <p:txBody>
-          <a:bodyPr/>
-          <a:lstStyle/>
-          <a:p>
-            <a:endParaRPr lang="en-US"/>
-          </a:p>
-        </p:txBody>
-      </p:sp>
-      <p:sp>
-        <p:nvSpPr>
-          <p:cNvPr id="9" name="Text Placeholder 8">
-            <a:extLst>
-              <a:ext uri="{FF2B5EF4-FFF2-40B4-BE49-F238E27FC236}">
-                <a16:creationId xmlns:a16="http://schemas.microsoft.com/office/drawing/2014/main" id="{CE9E7FB8-627B-8B20-8708-0CF9A20FC919}"/>
-              </a:ext>
-            </a:extLst>
-          </p:cNvPr>
-          <p:cNvSpPr>
-            <a:spLocks noGrp="1"/>
-          </p:cNvSpPr>
-          <p:nvPr>
-            <p:ph type="body" sz="quarter" idx="44"/>
-          </p:nvPr>
-        </p:nvSpPr>
-        <p:spPr/>
-        <p:txBody>
-          <a:bodyPr/>
-          <a:lstStyle/>
-          <a:p>
-            <a:endParaRPr lang="en-US"/>
-          </a:p>
-        </p:txBody>
-      </p:sp>
-      <p:sp>
-        <p:nvSpPr>
-          <p:cNvPr id="10" name="Text Placeholder 9">
-            <a:extLst>
-              <a:ext uri="{FF2B5EF4-FFF2-40B4-BE49-F238E27FC236}">
-                <a16:creationId xmlns:a16="http://schemas.microsoft.com/office/drawing/2014/main" id="{42FE9062-8B03-CF28-30AC-9CB7ACCDCCD9}"/>
-              </a:ext>
-            </a:extLst>
-          </p:cNvPr>
-          <p:cNvSpPr>
-            <a:spLocks noGrp="1"/>
-          </p:cNvSpPr>
-          <p:nvPr>
-            <p:ph type="body" sz="quarter" idx="45"/>
-          </p:nvPr>
-        </p:nvSpPr>
-        <p:spPr/>
-        <p:txBody>
-          <a:bodyPr/>
-          <a:lstStyle/>
-          <a:p>
-            <a:endParaRPr lang="en-US"/>
-          </a:p>
-        </p:txBody>
-      </p:sp>
-      <p:sp>
-        <p:nvSpPr>
-          <p:cNvPr id="11" name="Text Placeholder 10">
-            <a:extLst>
-              <a:ext uri="{FF2B5EF4-FFF2-40B4-BE49-F238E27FC236}">
-                <a16:creationId xmlns:a16="http://schemas.microsoft.com/office/drawing/2014/main" id="{9548F700-753B-0934-722C-AAC5355A58C1}"/>
-              </a:ext>
-            </a:extLst>
-          </p:cNvPr>
-          <p:cNvSpPr>
-            <a:spLocks noGrp="1"/>
-          </p:cNvSpPr>
-          <p:nvPr>
-            <p:ph type="body" sz="quarter" idx="46"/>
-          </p:nvPr>
-        </p:nvSpPr>
-        <p:spPr/>
-        <p:txBody>
-          <a:bodyPr/>
-          <a:lstStyle/>
-          <a:p>
-            <a:endParaRPr lang="en-US"/>
-          </a:p>
-        </p:txBody>
-      </p:sp>
-      <p:sp>
-        <p:nvSpPr>
-          <p:cNvPr id="12" name="Text Placeholder 11">
-            <a:extLst>
-              <a:ext uri="{FF2B5EF4-FFF2-40B4-BE49-F238E27FC236}">
-                <a16:creationId xmlns:a16="http://schemas.microsoft.com/office/drawing/2014/main" id="{AEEE17DD-1249-2575-20C5-978FFE645E54}"/>
-              </a:ext>
-            </a:extLst>
-          </p:cNvPr>
-          <p:cNvSpPr>
-            <a:spLocks noGrp="1"/>
-          </p:cNvSpPr>
-          <p:nvPr>
-            <p:ph type="body" sz="quarter" idx="47"/>
-          </p:nvPr>
-        </p:nvSpPr>
-        <p:spPr/>
-        <p:txBody>
-          <a:bodyPr/>
-          <a:lstStyle/>
-          <a:p>
-            <a:endParaRPr lang="en-US"/>
-          </a:p>
-        </p:txBody>
-      </p:sp>
-      <p:sp>
-        <p:nvSpPr>
-          <p:cNvPr id="13" name="Text Placeholder 12">
-            <a:extLst>
-              <a:ext uri="{FF2B5EF4-FFF2-40B4-BE49-F238E27FC236}">
-                <a16:creationId xmlns:a16="http://schemas.microsoft.com/office/drawing/2014/main" id="{34F49654-F25C-F07C-054D-3AAD9E957B7B}"/>
-              </a:ext>
-            </a:extLst>
-          </p:cNvPr>
-          <p:cNvSpPr>
-            <a:spLocks noGrp="1"/>
-          </p:cNvSpPr>
-          <p:nvPr>
-            <p:ph type="body" sz="quarter" idx="48"/>
-          </p:nvPr>
-        </p:nvSpPr>
-        <p:spPr/>
-        <p:txBody>
-          <a:bodyPr/>
-          <a:lstStyle/>
-          <a:p>
-            <a:endParaRPr lang="en-US"/>
-          </a:p>
-        </p:txBody>
-      </p:sp>
-      <p:sp>
-        <p:nvSpPr>
-          <p:cNvPr id="14" name="Title 13">
-            <a:extLst>
-              <a:ext uri="{FF2B5EF4-FFF2-40B4-BE49-F238E27FC236}">
-                <a16:creationId xmlns:a16="http://schemas.microsoft.com/office/drawing/2014/main" id="{D415BC36-8B19-DD78-D8F2-63C1A369AB6A}"/>
-              </a:ext>
-            </a:extLst>
-          </p:cNvPr>
-          <p:cNvSpPr>
-            <a:spLocks noGrp="1"/>
-          </p:cNvSpPr>
-          <p:nvPr>
-            <p:ph type="title"/>
-          </p:nvPr>
-        </p:nvSpPr>
-        <p:spPr/>
-        <p:txBody>
-          <a:bodyPr/>
-          <a:lstStyle/>
-          <a:p>
-            <a:endParaRPr lang="en-US"/>
-          </a:p>
-        </p:txBody>
-      </p:sp>
-      <p:sp>
-        <p:nvSpPr>
-          <p:cNvPr id="15" name="Text Placeholder 14">
-            <a:extLst>
-              <a:ext uri="{FF2B5EF4-FFF2-40B4-BE49-F238E27FC236}">
-                <a16:creationId xmlns:a16="http://schemas.microsoft.com/office/drawing/2014/main" id="{ACB8BB2A-0A54-38CA-4216-1D4F39E8981C}"/>
-              </a:ext>
-            </a:extLst>
-          </p:cNvPr>
-          <p:cNvSpPr>
-            <a:spLocks noGrp="1"/>
-          </p:cNvSpPr>
-          <p:nvPr>
-            <p:ph type="body" sz="quarter" idx="21"/>
-          </p:nvPr>
-        </p:nvSpPr>
-        <p:spPr/>
-        <p:txBody>
-          <a:bodyPr/>
-          <a:lstStyle/>
-          <a:p>
-            <a:endParaRPr lang="en-US"/>
-          </a:p>
-        </p:txBody>
-      </p:sp>
-      <p:sp>
-        <p:nvSpPr>
-          <p:cNvPr id="16" name="Picture Placeholder 15">
-            <a:extLst>
-              <a:ext uri="{FF2B5EF4-FFF2-40B4-BE49-F238E27FC236}">
-                <a16:creationId xmlns:a16="http://schemas.microsoft.com/office/drawing/2014/main" id="{DEC12799-8F85-1177-362B-7117A90551D8}"/>
-              </a:ext>
-            </a:extLst>
-          </p:cNvPr>
-          <p:cNvSpPr>
-            <a:spLocks noGrp="1"/>
-          </p:cNvSpPr>
-          <p:nvPr>
-            <p:ph type="pic" sz="quarter" idx="23"/>
           </p:nvPr>
         </p:nvSpPr>
         <p:spPr/>
@@ -7185,13 +7298,41 @@
           <a:bodyPr/>
           <a:lstStyle/>
           <a:p>
+            <a:r>
+              <a:rPr lang="en-US"/>
+              <a:t>42x42 square poster template — layout 3</a:t>
+            </a:r>
+          </a:p>
+        </p:txBody>
+      </p:sp>
+      <p:sp>
+        <p:nvSpPr>
+          <p:cNvPr id="5" name="Institution logo(s)">
+            <a:extLst>
+              <a:ext uri="{FF2B5EF4-FFF2-40B4-BE49-F238E27FC236}">
+                <a16:creationId xmlns:a16="http://schemas.microsoft.com/office/drawing/2014/main" id="{D2A30667-5EFC-0E82-B7C9-4BDE81EAB96A}"/>
+              </a:ext>
+            </a:extLst>
+          </p:cNvPr>
+          <p:cNvSpPr>
+            <a:spLocks noGrp="1"/>
+          </p:cNvSpPr>
+          <p:nvPr>
+            <p:ph type="pic" sz="quarter" idx="23"/>
+          </p:nvPr>
+        </p:nvSpPr>
+        <p:spPr/>
+        <p:txBody>
+          <a:bodyPr/>
+          <a:lstStyle/>
+          <a:p>
             <a:endParaRPr lang="en-US"/>
           </a:p>
         </p:txBody>
       </p:sp>
       <p:sp>
         <p:nvSpPr>
-          <p:cNvPr id="3" name="Text Placeholder 2">
+          <p:cNvPr id="3" name="Authors: 60pt">
             <a:extLst>
               <a:ext uri="{FF2B5EF4-FFF2-40B4-BE49-F238E27FC236}">
                 <a16:creationId xmlns:a16="http://schemas.microsoft.com/office/drawing/2014/main" id="{6152E1F2-8859-5E33-87D7-1FA19B9B32CB}"/>
@@ -7216,7 +7357,82 @@
       </p:sp>
       <p:sp>
         <p:nvSpPr>
-          <p:cNvPr id="4" name="Text Placeholder 3">
+          <p:cNvPr id="6" name="Insert content here: 36pt">
+            <a:extLst>
+              <a:ext uri="{FF2B5EF4-FFF2-40B4-BE49-F238E27FC236}">
+                <a16:creationId xmlns:a16="http://schemas.microsoft.com/office/drawing/2014/main" id="{85E7CA61-0529-4434-91AC-476D1E08AE19}"/>
+              </a:ext>
+            </a:extLst>
+          </p:cNvPr>
+          <p:cNvSpPr>
+            <a:spLocks noGrp="1"/>
+          </p:cNvSpPr>
+          <p:nvPr>
+            <p:ph type="body" sz="quarter" idx="25"/>
+          </p:nvPr>
+        </p:nvSpPr>
+        <p:spPr/>
+        <p:txBody>
+          <a:bodyPr/>
+          <a:lstStyle/>
+          <a:p>
+            <a:endParaRPr lang="en-US"/>
+          </a:p>
+        </p:txBody>
+      </p:sp>
+      <p:sp>
+        <p:nvSpPr>
+          <p:cNvPr id="8" name="Insert content here: 36pt">
+            <a:extLst>
+              <a:ext uri="{FF2B5EF4-FFF2-40B4-BE49-F238E27FC236}">
+                <a16:creationId xmlns:a16="http://schemas.microsoft.com/office/drawing/2014/main" id="{34350473-D6A6-0C84-2DEE-2CB962653F31}"/>
+              </a:ext>
+            </a:extLst>
+          </p:cNvPr>
+          <p:cNvSpPr>
+            <a:spLocks noGrp="1"/>
+          </p:cNvSpPr>
+          <p:nvPr>
+            <p:ph type="body" sz="quarter" idx="38"/>
+          </p:nvPr>
+        </p:nvSpPr>
+        <p:spPr/>
+        <p:txBody>
+          <a:bodyPr/>
+          <a:lstStyle/>
+          <a:p>
+            <a:endParaRPr lang="en-US"/>
+          </a:p>
+        </p:txBody>
+      </p:sp>
+      <p:sp>
+        <p:nvSpPr>
+          <p:cNvPr id="10" name="Insert content here: 36pt">
+            <a:extLst>
+              <a:ext uri="{FF2B5EF4-FFF2-40B4-BE49-F238E27FC236}">
+                <a16:creationId xmlns:a16="http://schemas.microsoft.com/office/drawing/2014/main" id="{314C26AF-32E0-FC9C-4FF2-86055BCB01F3}"/>
+              </a:ext>
+            </a:extLst>
+          </p:cNvPr>
+          <p:cNvSpPr>
+            <a:spLocks noGrp="1"/>
+          </p:cNvSpPr>
+          <p:nvPr>
+            <p:ph type="body" sz="quarter" idx="41"/>
+          </p:nvPr>
+        </p:nvSpPr>
+        <p:spPr/>
+        <p:txBody>
+          <a:bodyPr/>
+          <a:lstStyle/>
+          <a:p>
+            <a:endParaRPr lang="en-US"/>
+          </a:p>
+        </p:txBody>
+      </p:sp>
+      <p:sp>
+        <p:nvSpPr>
+          <p:cNvPr id="4" name="Insert content here: 36pt">
             <a:extLst>
               <a:ext uri="{FF2B5EF4-FFF2-40B4-BE49-F238E27FC236}">
                 <a16:creationId xmlns:a16="http://schemas.microsoft.com/office/drawing/2014/main" id="{588EF623-62CC-185B-3EB3-25A4AF2BD9A5}"/>
@@ -7241,18 +7457,18 @@
       </p:sp>
       <p:sp>
         <p:nvSpPr>
-          <p:cNvPr id="5" name="Picture Placeholder 4">
-            <a:extLst>
-              <a:ext uri="{FF2B5EF4-FFF2-40B4-BE49-F238E27FC236}">
-                <a16:creationId xmlns:a16="http://schemas.microsoft.com/office/drawing/2014/main" id="{D2A30667-5EFC-0E82-B7C9-4BDE81EAB96A}"/>
-              </a:ext>
-            </a:extLst>
-          </p:cNvPr>
-          <p:cNvSpPr>
-            <a:spLocks noGrp="1"/>
-          </p:cNvSpPr>
-          <p:nvPr>
-            <p:ph type="pic" sz="quarter" idx="23"/>
+          <p:cNvPr id="9" name="Insert content here: 36pt">
+            <a:extLst>
+              <a:ext uri="{FF2B5EF4-FFF2-40B4-BE49-F238E27FC236}">
+                <a16:creationId xmlns:a16="http://schemas.microsoft.com/office/drawing/2014/main" id="{EB309E0E-F443-F92D-F918-86F2C8513CA6}"/>
+              </a:ext>
+            </a:extLst>
+          </p:cNvPr>
+          <p:cNvSpPr>
+            <a:spLocks noGrp="1"/>
+          </p:cNvSpPr>
+          <p:nvPr>
+            <p:ph type="body" sz="quarter" idx="39"/>
           </p:nvPr>
         </p:nvSpPr>
         <p:spPr/>
@@ -7266,32 +7482,7 @@
       </p:sp>
       <p:sp>
         <p:nvSpPr>
-          <p:cNvPr id="6" name="Text Placeholder 5">
-            <a:extLst>
-              <a:ext uri="{FF2B5EF4-FFF2-40B4-BE49-F238E27FC236}">
-                <a16:creationId xmlns:a16="http://schemas.microsoft.com/office/drawing/2014/main" id="{85E7CA61-0529-4434-91AC-476D1E08AE19}"/>
-              </a:ext>
-            </a:extLst>
-          </p:cNvPr>
-          <p:cNvSpPr>
-            <a:spLocks noGrp="1"/>
-          </p:cNvSpPr>
-          <p:nvPr>
-            <p:ph type="body" sz="quarter" idx="25"/>
-          </p:nvPr>
-        </p:nvSpPr>
-        <p:spPr/>
-        <p:txBody>
-          <a:bodyPr/>
-          <a:lstStyle/>
-          <a:p>
-            <a:endParaRPr lang="en-US"/>
-          </a:p>
-        </p:txBody>
-      </p:sp>
-      <p:sp>
-        <p:nvSpPr>
-          <p:cNvPr id="7" name="Text Placeholder 6">
+          <p:cNvPr id="7" name="Insert content here: 36pt">
             <a:extLst>
               <a:ext uri="{FF2B5EF4-FFF2-40B4-BE49-F238E27FC236}">
                 <a16:creationId xmlns:a16="http://schemas.microsoft.com/office/drawing/2014/main" id="{F3BAC9BA-9AD8-7DDA-C106-C12830376A83}"/>
@@ -7303,81 +7494,6 @@
           </p:cNvSpPr>
           <p:nvPr>
             <p:ph type="body" sz="quarter" idx="37"/>
-          </p:nvPr>
-        </p:nvSpPr>
-        <p:spPr/>
-        <p:txBody>
-          <a:bodyPr/>
-          <a:lstStyle/>
-          <a:p>
-            <a:endParaRPr lang="en-US"/>
-          </a:p>
-        </p:txBody>
-      </p:sp>
-      <p:sp>
-        <p:nvSpPr>
-          <p:cNvPr id="8" name="Text Placeholder 7">
-            <a:extLst>
-              <a:ext uri="{FF2B5EF4-FFF2-40B4-BE49-F238E27FC236}">
-                <a16:creationId xmlns:a16="http://schemas.microsoft.com/office/drawing/2014/main" id="{34350473-D6A6-0C84-2DEE-2CB962653F31}"/>
-              </a:ext>
-            </a:extLst>
-          </p:cNvPr>
-          <p:cNvSpPr>
-            <a:spLocks noGrp="1"/>
-          </p:cNvSpPr>
-          <p:nvPr>
-            <p:ph type="body" sz="quarter" idx="38"/>
-          </p:nvPr>
-        </p:nvSpPr>
-        <p:spPr/>
-        <p:txBody>
-          <a:bodyPr/>
-          <a:lstStyle/>
-          <a:p>
-            <a:endParaRPr lang="en-US"/>
-          </a:p>
-        </p:txBody>
-      </p:sp>
-      <p:sp>
-        <p:nvSpPr>
-          <p:cNvPr id="9" name="Text Placeholder 8">
-            <a:extLst>
-              <a:ext uri="{FF2B5EF4-FFF2-40B4-BE49-F238E27FC236}">
-                <a16:creationId xmlns:a16="http://schemas.microsoft.com/office/drawing/2014/main" id="{EB309E0E-F443-F92D-F918-86F2C8513CA6}"/>
-              </a:ext>
-            </a:extLst>
-          </p:cNvPr>
-          <p:cNvSpPr>
-            <a:spLocks noGrp="1"/>
-          </p:cNvSpPr>
-          <p:nvPr>
-            <p:ph type="body" sz="quarter" idx="39"/>
-          </p:nvPr>
-        </p:nvSpPr>
-        <p:spPr/>
-        <p:txBody>
-          <a:bodyPr/>
-          <a:lstStyle/>
-          <a:p>
-            <a:endParaRPr lang="en-US"/>
-          </a:p>
-        </p:txBody>
-      </p:sp>
-      <p:sp>
-        <p:nvSpPr>
-          <p:cNvPr id="10" name="Text Placeholder 9">
-            <a:extLst>
-              <a:ext uri="{FF2B5EF4-FFF2-40B4-BE49-F238E27FC236}">
-                <a16:creationId xmlns:a16="http://schemas.microsoft.com/office/drawing/2014/main" id="{314C26AF-32E0-FC9C-4FF2-86055BCB01F3}"/>
-              </a:ext>
-            </a:extLst>
-          </p:cNvPr>
-          <p:cNvSpPr>
-            <a:spLocks noGrp="1"/>
-          </p:cNvSpPr>
-          <p:nvPr>
-            <p:ph type="body" sz="quarter" idx="41"/>
           </p:nvPr>
         </p:nvSpPr>
         <p:spPr/>
@@ -7421,7 +7537,135 @@
       </p:grpSpPr>
       <p:sp>
         <p:nvSpPr>
-          <p:cNvPr id="2" name="Content Placeholder 1">
+          <p:cNvPr id="18" name="Title 17">
+            <a:extLst>
+              <a:ext uri="{FF2B5EF4-FFF2-40B4-BE49-F238E27FC236}">
+                <a16:creationId xmlns:a16="http://schemas.microsoft.com/office/drawing/2014/main" id="{46D509EF-8F60-72FD-873E-4D78AE814D47}"/>
+              </a:ext>
+            </a:extLst>
+          </p:cNvPr>
+          <p:cNvSpPr>
+            <a:spLocks noGrp="1"/>
+          </p:cNvSpPr>
+          <p:nvPr>
+            <p:ph type="title"/>
+          </p:nvPr>
+        </p:nvSpPr>
+        <p:spPr/>
+        <p:txBody>
+          <a:bodyPr/>
+          <a:lstStyle/>
+          <a:p>
+            <a:r>
+              <a:rPr lang="en-US"/>
+              <a:t>42x42 square poster template — layout 4</a:t>
+            </a:r>
+          </a:p>
+        </p:txBody>
+      </p:sp>
+      <p:sp>
+        <p:nvSpPr>
+          <p:cNvPr id="20" name="Logo or QRC">
+            <a:extLst>
+              <a:ext uri="{FF2B5EF4-FFF2-40B4-BE49-F238E27FC236}">
+                <a16:creationId xmlns:a16="http://schemas.microsoft.com/office/drawing/2014/main" id="{BAFCA535-336B-C731-4066-CB8E40EB945E}"/>
+              </a:ext>
+            </a:extLst>
+          </p:cNvPr>
+          <p:cNvSpPr>
+            <a:spLocks noGrp="1"/>
+          </p:cNvSpPr>
+          <p:nvPr>
+            <p:ph type="pic" sz="quarter" idx="23"/>
+          </p:nvPr>
+        </p:nvSpPr>
+        <p:spPr/>
+        <p:txBody>
+          <a:bodyPr/>
+          <a:lstStyle/>
+          <a:p>
+            <a:endParaRPr lang="en-US"/>
+          </a:p>
+        </p:txBody>
+      </p:sp>
+      <p:sp>
+        <p:nvSpPr>
+          <p:cNvPr id="19" name="Author(s): 60pt  Affiliation(s): 48pt">
+            <a:extLst>
+              <a:ext uri="{FF2B5EF4-FFF2-40B4-BE49-F238E27FC236}">
+                <a16:creationId xmlns:a16="http://schemas.microsoft.com/office/drawing/2014/main" id="{0E13EF9F-9CC0-F945-9BC1-2E6133BC7E38}"/>
+              </a:ext>
+            </a:extLst>
+          </p:cNvPr>
+          <p:cNvSpPr>
+            <a:spLocks noGrp="1"/>
+          </p:cNvSpPr>
+          <p:nvPr>
+            <p:ph type="body" sz="quarter" idx="21"/>
+          </p:nvPr>
+        </p:nvSpPr>
+        <p:spPr/>
+        <p:txBody>
+          <a:bodyPr/>
+          <a:lstStyle/>
+          <a:p>
+            <a:endParaRPr lang="en-US"/>
+          </a:p>
+        </p:txBody>
+      </p:sp>
+      <p:sp>
+        <p:nvSpPr>
+          <p:cNvPr id="3" name="Heading: 60pt bold">
+            <a:extLst>
+              <a:ext uri="{FF2B5EF4-FFF2-40B4-BE49-F238E27FC236}">
+                <a16:creationId xmlns:a16="http://schemas.microsoft.com/office/drawing/2014/main" id="{FB354FBE-16A3-0EAC-8085-C9E810FDFB1B}"/>
+              </a:ext>
+            </a:extLst>
+          </p:cNvPr>
+          <p:cNvSpPr>
+            <a:spLocks noGrp="1"/>
+          </p:cNvSpPr>
+          <p:nvPr>
+            <p:ph idx="1"/>
+          </p:nvPr>
+        </p:nvSpPr>
+        <p:spPr/>
+        <p:txBody>
+          <a:bodyPr/>
+          <a:lstStyle/>
+          <a:p>
+            <a:endParaRPr lang="en-US"/>
+          </a:p>
+        </p:txBody>
+      </p:sp>
+      <p:sp>
+        <p:nvSpPr>
+          <p:cNvPr id="9" name="Insert content here: 36pt">
+            <a:extLst>
+              <a:ext uri="{FF2B5EF4-FFF2-40B4-BE49-F238E27FC236}">
+                <a16:creationId xmlns:a16="http://schemas.microsoft.com/office/drawing/2014/main" id="{7DC4C549-1BDE-6A19-B858-AF5CF6C07357}"/>
+              </a:ext>
+            </a:extLst>
+          </p:cNvPr>
+          <p:cNvSpPr>
+            <a:spLocks noGrp="1"/>
+          </p:cNvSpPr>
+          <p:nvPr>
+            <p:ph type="body" sz="quarter" idx="22"/>
+          </p:nvPr>
+        </p:nvSpPr>
+        <p:spPr/>
+        <p:txBody>
+          <a:bodyPr/>
+          <a:lstStyle/>
+          <a:p>
+            <a:endParaRPr lang="en-US"/>
+          </a:p>
+        </p:txBody>
+      </p:sp>
+      <p:sp>
+        <p:nvSpPr>
+          <p:cNvPr id="2" name="Heading: 60pt bold">
             <a:extLst>
               <a:ext uri="{FF2B5EF4-FFF2-40B4-BE49-F238E27FC236}">
                 <a16:creationId xmlns:a16="http://schemas.microsoft.com/office/drawing/2014/main" id="{9048AA7D-E090-A819-3DE4-86E28EEAE21A}"/>
@@ -7446,18 +7690,18 @@
       </p:sp>
       <p:sp>
         <p:nvSpPr>
-          <p:cNvPr id="3" name="Content Placeholder 2">
-            <a:extLst>
-              <a:ext uri="{FF2B5EF4-FFF2-40B4-BE49-F238E27FC236}">
-                <a16:creationId xmlns:a16="http://schemas.microsoft.com/office/drawing/2014/main" id="{FB354FBE-16A3-0EAC-8085-C9E810FDFB1B}"/>
-              </a:ext>
-            </a:extLst>
-          </p:cNvPr>
-          <p:cNvSpPr>
-            <a:spLocks noGrp="1"/>
-          </p:cNvSpPr>
-          <p:nvPr>
-            <p:ph idx="1"/>
+          <p:cNvPr id="8" name="Insert content here: 36pt">
+            <a:extLst>
+              <a:ext uri="{FF2B5EF4-FFF2-40B4-BE49-F238E27FC236}">
+                <a16:creationId xmlns:a16="http://schemas.microsoft.com/office/drawing/2014/main" id="{A5354C29-D645-5F4A-8244-B4371B257F6D}"/>
+              </a:ext>
+            </a:extLst>
+          </p:cNvPr>
+          <p:cNvSpPr>
+            <a:spLocks noGrp="1"/>
+          </p:cNvSpPr>
+          <p:nvPr>
+            <p:ph type="body" sz="quarter" idx="25"/>
           </p:nvPr>
         </p:nvSpPr>
         <p:spPr/>
@@ -7471,7 +7715,282 @@
       </p:sp>
       <p:sp>
         <p:nvSpPr>
-          <p:cNvPr id="4" name="Text Placeholder 3">
+          <p:cNvPr id="10" name="Heading: 60pt bold">
+            <a:extLst>
+              <a:ext uri="{FF2B5EF4-FFF2-40B4-BE49-F238E27FC236}">
+                <a16:creationId xmlns:a16="http://schemas.microsoft.com/office/drawing/2014/main" id="{4B6A2451-3052-83A4-FA95-A99E0D1C6672}"/>
+              </a:ext>
+            </a:extLst>
+          </p:cNvPr>
+          <p:cNvSpPr>
+            <a:spLocks noGrp="1"/>
+          </p:cNvSpPr>
+          <p:nvPr>
+            <p:ph idx="32"/>
+          </p:nvPr>
+        </p:nvSpPr>
+        <p:spPr/>
+        <p:txBody>
+          <a:bodyPr/>
+          <a:lstStyle/>
+          <a:p>
+            <a:endParaRPr lang="en-US"/>
+          </a:p>
+        </p:txBody>
+      </p:sp>
+      <p:sp>
+        <p:nvSpPr>
+          <p:cNvPr id="7" name="Insert content here: 36pt">
+            <a:extLst>
+              <a:ext uri="{FF2B5EF4-FFF2-40B4-BE49-F238E27FC236}">
+                <a16:creationId xmlns:a16="http://schemas.microsoft.com/office/drawing/2014/main" id="{F0856E8D-B3D0-4F4B-EB4B-2CC3736DFC44}"/>
+              </a:ext>
+            </a:extLst>
+          </p:cNvPr>
+          <p:cNvSpPr>
+            <a:spLocks noGrp="1"/>
+          </p:cNvSpPr>
+          <p:nvPr>
+            <p:ph type="body" sz="quarter" idx="26"/>
+          </p:nvPr>
+        </p:nvSpPr>
+        <p:spPr/>
+        <p:txBody>
+          <a:bodyPr/>
+          <a:lstStyle/>
+          <a:p>
+            <a:endParaRPr lang="en-US"/>
+          </a:p>
+        </p:txBody>
+      </p:sp>
+      <p:sp>
+        <p:nvSpPr>
+          <p:cNvPr id="17" name="Picture Placeholder 16">
+            <a:extLst>
+              <a:ext uri="{FF2B5EF4-FFF2-40B4-BE49-F238E27FC236}">
+                <a16:creationId xmlns:a16="http://schemas.microsoft.com/office/drawing/2014/main" id="{4B88C624-34F5-7CD4-DC67-ED9154607957}"/>
+              </a:ext>
+            </a:extLst>
+          </p:cNvPr>
+          <p:cNvSpPr>
+            <a:spLocks noGrp="1"/>
+          </p:cNvSpPr>
+          <p:nvPr>
+            <p:ph type="pic" sz="quarter" idx="44"/>
+          </p:nvPr>
+        </p:nvSpPr>
+        <p:spPr/>
+        <p:txBody>
+          <a:bodyPr/>
+          <a:lstStyle/>
+          <a:p>
+            <a:endParaRPr lang="en-US"/>
+          </a:p>
+        </p:txBody>
+      </p:sp>
+      <p:sp>
+        <p:nvSpPr>
+          <p:cNvPr id="16" name="Picture Placeholder 15">
+            <a:extLst>
+              <a:ext uri="{FF2B5EF4-FFF2-40B4-BE49-F238E27FC236}">
+                <a16:creationId xmlns:a16="http://schemas.microsoft.com/office/drawing/2014/main" id="{EE614859-14D4-D154-2224-C26AF5795647}"/>
+              </a:ext>
+            </a:extLst>
+          </p:cNvPr>
+          <p:cNvSpPr>
+            <a:spLocks noGrp="1"/>
+          </p:cNvSpPr>
+          <p:nvPr>
+            <p:ph type="pic" sz="quarter" idx="43"/>
+          </p:nvPr>
+        </p:nvSpPr>
+        <p:spPr/>
+        <p:txBody>
+          <a:bodyPr/>
+          <a:lstStyle/>
+          <a:p>
+            <a:endParaRPr lang="en-US"/>
+          </a:p>
+        </p:txBody>
+      </p:sp>
+      <p:sp>
+        <p:nvSpPr>
+          <p:cNvPr id="13" name="Click to add figure caption">
+            <a:extLst>
+              <a:ext uri="{FF2B5EF4-FFF2-40B4-BE49-F238E27FC236}">
+                <a16:creationId xmlns:a16="http://schemas.microsoft.com/office/drawing/2014/main" id="{F32F01DA-A3B4-71E7-014C-A5D0054CAE3E}"/>
+              </a:ext>
+            </a:extLst>
+          </p:cNvPr>
+          <p:cNvSpPr>
+            <a:spLocks noGrp="1"/>
+          </p:cNvSpPr>
+          <p:nvPr>
+            <p:ph type="chart" sz="quarter" idx="37"/>
+          </p:nvPr>
+        </p:nvSpPr>
+        <p:spPr/>
+        <p:txBody>
+          <a:bodyPr/>
+          <a:lstStyle/>
+          <a:p>
+            <a:endParaRPr lang="en-US"/>
+          </a:p>
+        </p:txBody>
+      </p:sp>
+      <p:sp>
+        <p:nvSpPr>
+          <p:cNvPr id="15" name="Picture Placeholder 14">
+            <a:extLst>
+              <a:ext uri="{FF2B5EF4-FFF2-40B4-BE49-F238E27FC236}">
+                <a16:creationId xmlns:a16="http://schemas.microsoft.com/office/drawing/2014/main" id="{3C34DEA0-C21F-02A3-78C6-05DBD8065B54}"/>
+              </a:ext>
+            </a:extLst>
+          </p:cNvPr>
+          <p:cNvSpPr>
+            <a:spLocks noGrp="1"/>
+          </p:cNvSpPr>
+          <p:nvPr>
+            <p:ph type="pic" sz="quarter" idx="42"/>
+          </p:nvPr>
+        </p:nvSpPr>
+        <p:spPr/>
+        <p:txBody>
+          <a:bodyPr/>
+          <a:lstStyle/>
+          <a:p>
+            <a:endParaRPr lang="en-US"/>
+          </a:p>
+        </p:txBody>
+      </p:sp>
+      <p:sp>
+        <p:nvSpPr>
+          <p:cNvPr id="14" name="Picture Placeholder 13">
+            <a:extLst>
+              <a:ext uri="{FF2B5EF4-FFF2-40B4-BE49-F238E27FC236}">
+                <a16:creationId xmlns:a16="http://schemas.microsoft.com/office/drawing/2014/main" id="{563E6F39-9699-D14D-0061-2E9889364D19}"/>
+              </a:ext>
+            </a:extLst>
+          </p:cNvPr>
+          <p:cNvSpPr>
+            <a:spLocks noGrp="1"/>
+          </p:cNvSpPr>
+          <p:nvPr>
+            <p:ph type="pic" sz="quarter" idx="41"/>
+          </p:nvPr>
+        </p:nvSpPr>
+        <p:spPr/>
+        <p:txBody>
+          <a:bodyPr/>
+          <a:lstStyle/>
+          <a:p>
+            <a:endParaRPr lang="en-US"/>
+          </a:p>
+        </p:txBody>
+      </p:sp>
+      <p:sp>
+        <p:nvSpPr>
+          <p:cNvPr id="11" name="Heading: 60pt bold">
+            <a:extLst>
+              <a:ext uri="{FF2B5EF4-FFF2-40B4-BE49-F238E27FC236}">
+                <a16:creationId xmlns:a16="http://schemas.microsoft.com/office/drawing/2014/main" id="{BF1FA8F7-80DE-7646-0A29-600855C1204E}"/>
+              </a:ext>
+            </a:extLst>
+          </p:cNvPr>
+          <p:cNvSpPr>
+            <a:spLocks noGrp="1"/>
+          </p:cNvSpPr>
+          <p:nvPr>
+            <p:ph idx="33"/>
+          </p:nvPr>
+        </p:nvSpPr>
+        <p:spPr/>
+        <p:txBody>
+          <a:bodyPr/>
+          <a:lstStyle/>
+          <a:p>
+            <a:endParaRPr lang="en-US"/>
+          </a:p>
+        </p:txBody>
+      </p:sp>
+      <p:sp>
+        <p:nvSpPr>
+          <p:cNvPr id="6" name="Insert content here: 36pt">
+            <a:extLst>
+              <a:ext uri="{FF2B5EF4-FFF2-40B4-BE49-F238E27FC236}">
+                <a16:creationId xmlns:a16="http://schemas.microsoft.com/office/drawing/2014/main" id="{0F8E81DB-2B22-0552-A5C8-CA047F83D73C}"/>
+              </a:ext>
+            </a:extLst>
+          </p:cNvPr>
+          <p:cNvSpPr>
+            <a:spLocks noGrp="1"/>
+          </p:cNvSpPr>
+          <p:nvPr>
+            <p:ph type="body" sz="quarter" idx="28"/>
+          </p:nvPr>
+        </p:nvSpPr>
+        <p:spPr/>
+        <p:txBody>
+          <a:bodyPr/>
+          <a:lstStyle/>
+          <a:p>
+            <a:endParaRPr lang="en-US"/>
+          </a:p>
+        </p:txBody>
+      </p:sp>
+      <p:sp>
+        <p:nvSpPr>
+          <p:cNvPr id="12" name="Heading: 60pt bold">
+            <a:extLst>
+              <a:ext uri="{FF2B5EF4-FFF2-40B4-BE49-F238E27FC236}">
+                <a16:creationId xmlns:a16="http://schemas.microsoft.com/office/drawing/2014/main" id="{B55DEF60-831E-9BD4-D2E4-3ED99D9E2F4B}"/>
+              </a:ext>
+            </a:extLst>
+          </p:cNvPr>
+          <p:cNvSpPr>
+            <a:spLocks noGrp="1"/>
+          </p:cNvSpPr>
+          <p:nvPr>
+            <p:ph idx="34"/>
+          </p:nvPr>
+        </p:nvSpPr>
+        <p:spPr/>
+        <p:txBody>
+          <a:bodyPr/>
+          <a:lstStyle/>
+          <a:p>
+            <a:endParaRPr lang="en-US"/>
+          </a:p>
+        </p:txBody>
+      </p:sp>
+      <p:sp>
+        <p:nvSpPr>
+          <p:cNvPr id="5" name="Insert content here: 36pt">
+            <a:extLst>
+              <a:ext uri="{FF2B5EF4-FFF2-40B4-BE49-F238E27FC236}">
+                <a16:creationId xmlns:a16="http://schemas.microsoft.com/office/drawing/2014/main" id="{DDEB43AE-3AED-4E14-631A-DEA07BB6A25F}"/>
+              </a:ext>
+            </a:extLst>
+          </p:cNvPr>
+          <p:cNvSpPr>
+            <a:spLocks noGrp="1"/>
+          </p:cNvSpPr>
+          <p:nvPr>
+            <p:ph type="body" sz="quarter" idx="30"/>
+          </p:nvPr>
+        </p:nvSpPr>
+        <p:spPr/>
+        <p:txBody>
+          <a:bodyPr/>
+          <a:lstStyle/>
+          <a:p>
+            <a:endParaRPr lang="en-US"/>
+          </a:p>
+        </p:txBody>
+      </p:sp>
+      <p:sp>
+        <p:nvSpPr>
+          <p:cNvPr id="4" name="Insert acknowledgements / references here: 30pt">
             <a:extLst>
               <a:ext uri="{FF2B5EF4-FFF2-40B4-BE49-F238E27FC236}">
                 <a16:creationId xmlns:a16="http://schemas.microsoft.com/office/drawing/2014/main" id="{0C486DBA-BE54-DC69-B3BC-5B6A7DACD452}"/>
@@ -7483,406 +8002,6 @@
           </p:cNvSpPr>
           <p:nvPr>
             <p:ph type="body" sz="quarter" idx="31"/>
-          </p:nvPr>
-        </p:nvSpPr>
-        <p:spPr/>
-        <p:txBody>
-          <a:bodyPr/>
-          <a:lstStyle/>
-          <a:p>
-            <a:endParaRPr lang="en-US"/>
-          </a:p>
-        </p:txBody>
-      </p:sp>
-      <p:sp>
-        <p:nvSpPr>
-          <p:cNvPr id="5" name="Text Placeholder 4">
-            <a:extLst>
-              <a:ext uri="{FF2B5EF4-FFF2-40B4-BE49-F238E27FC236}">
-                <a16:creationId xmlns:a16="http://schemas.microsoft.com/office/drawing/2014/main" id="{DDEB43AE-3AED-4E14-631A-DEA07BB6A25F}"/>
-              </a:ext>
-            </a:extLst>
-          </p:cNvPr>
-          <p:cNvSpPr>
-            <a:spLocks noGrp="1"/>
-          </p:cNvSpPr>
-          <p:nvPr>
-            <p:ph type="body" sz="quarter" idx="30"/>
-          </p:nvPr>
-        </p:nvSpPr>
-        <p:spPr/>
-        <p:txBody>
-          <a:bodyPr/>
-          <a:lstStyle/>
-          <a:p>
-            <a:endParaRPr lang="en-US"/>
-          </a:p>
-        </p:txBody>
-      </p:sp>
-      <p:sp>
-        <p:nvSpPr>
-          <p:cNvPr id="6" name="Text Placeholder 5">
-            <a:extLst>
-              <a:ext uri="{FF2B5EF4-FFF2-40B4-BE49-F238E27FC236}">
-                <a16:creationId xmlns:a16="http://schemas.microsoft.com/office/drawing/2014/main" id="{0F8E81DB-2B22-0552-A5C8-CA047F83D73C}"/>
-              </a:ext>
-            </a:extLst>
-          </p:cNvPr>
-          <p:cNvSpPr>
-            <a:spLocks noGrp="1"/>
-          </p:cNvSpPr>
-          <p:nvPr>
-            <p:ph type="body" sz="quarter" idx="28"/>
-          </p:nvPr>
-        </p:nvSpPr>
-        <p:spPr/>
-        <p:txBody>
-          <a:bodyPr/>
-          <a:lstStyle/>
-          <a:p>
-            <a:endParaRPr lang="en-US"/>
-          </a:p>
-        </p:txBody>
-      </p:sp>
-      <p:sp>
-        <p:nvSpPr>
-          <p:cNvPr id="7" name="Text Placeholder 6">
-            <a:extLst>
-              <a:ext uri="{FF2B5EF4-FFF2-40B4-BE49-F238E27FC236}">
-                <a16:creationId xmlns:a16="http://schemas.microsoft.com/office/drawing/2014/main" id="{F0856E8D-B3D0-4F4B-EB4B-2CC3736DFC44}"/>
-              </a:ext>
-            </a:extLst>
-          </p:cNvPr>
-          <p:cNvSpPr>
-            <a:spLocks noGrp="1"/>
-          </p:cNvSpPr>
-          <p:nvPr>
-            <p:ph type="body" sz="quarter" idx="26"/>
-          </p:nvPr>
-        </p:nvSpPr>
-        <p:spPr/>
-        <p:txBody>
-          <a:bodyPr/>
-          <a:lstStyle/>
-          <a:p>
-            <a:endParaRPr lang="en-US"/>
-          </a:p>
-        </p:txBody>
-      </p:sp>
-      <p:sp>
-        <p:nvSpPr>
-          <p:cNvPr id="8" name="Text Placeholder 7">
-            <a:extLst>
-              <a:ext uri="{FF2B5EF4-FFF2-40B4-BE49-F238E27FC236}">
-                <a16:creationId xmlns:a16="http://schemas.microsoft.com/office/drawing/2014/main" id="{A5354C29-D645-5F4A-8244-B4371B257F6D}"/>
-              </a:ext>
-            </a:extLst>
-          </p:cNvPr>
-          <p:cNvSpPr>
-            <a:spLocks noGrp="1"/>
-          </p:cNvSpPr>
-          <p:nvPr>
-            <p:ph type="body" sz="quarter" idx="25"/>
-          </p:nvPr>
-        </p:nvSpPr>
-        <p:spPr/>
-        <p:txBody>
-          <a:bodyPr/>
-          <a:lstStyle/>
-          <a:p>
-            <a:endParaRPr lang="en-US"/>
-          </a:p>
-        </p:txBody>
-      </p:sp>
-      <p:sp>
-        <p:nvSpPr>
-          <p:cNvPr id="9" name="Text Placeholder 8">
-            <a:extLst>
-              <a:ext uri="{FF2B5EF4-FFF2-40B4-BE49-F238E27FC236}">
-                <a16:creationId xmlns:a16="http://schemas.microsoft.com/office/drawing/2014/main" id="{7DC4C549-1BDE-6A19-B858-AF5CF6C07357}"/>
-              </a:ext>
-            </a:extLst>
-          </p:cNvPr>
-          <p:cNvSpPr>
-            <a:spLocks noGrp="1"/>
-          </p:cNvSpPr>
-          <p:nvPr>
-            <p:ph type="body" sz="quarter" idx="22"/>
-          </p:nvPr>
-        </p:nvSpPr>
-        <p:spPr/>
-        <p:txBody>
-          <a:bodyPr/>
-          <a:lstStyle/>
-          <a:p>
-            <a:endParaRPr lang="en-US"/>
-          </a:p>
-        </p:txBody>
-      </p:sp>
-      <p:sp>
-        <p:nvSpPr>
-          <p:cNvPr id="10" name="Content Placeholder 9">
-            <a:extLst>
-              <a:ext uri="{FF2B5EF4-FFF2-40B4-BE49-F238E27FC236}">
-                <a16:creationId xmlns:a16="http://schemas.microsoft.com/office/drawing/2014/main" id="{4B6A2451-3052-83A4-FA95-A99E0D1C6672}"/>
-              </a:ext>
-            </a:extLst>
-          </p:cNvPr>
-          <p:cNvSpPr>
-            <a:spLocks noGrp="1"/>
-          </p:cNvSpPr>
-          <p:nvPr>
-            <p:ph idx="32"/>
-          </p:nvPr>
-        </p:nvSpPr>
-        <p:spPr/>
-        <p:txBody>
-          <a:bodyPr/>
-          <a:lstStyle/>
-          <a:p>
-            <a:endParaRPr lang="en-US"/>
-          </a:p>
-        </p:txBody>
-      </p:sp>
-      <p:sp>
-        <p:nvSpPr>
-          <p:cNvPr id="11" name="Content Placeholder 10">
-            <a:extLst>
-              <a:ext uri="{FF2B5EF4-FFF2-40B4-BE49-F238E27FC236}">
-                <a16:creationId xmlns:a16="http://schemas.microsoft.com/office/drawing/2014/main" id="{BF1FA8F7-80DE-7646-0A29-600855C1204E}"/>
-              </a:ext>
-            </a:extLst>
-          </p:cNvPr>
-          <p:cNvSpPr>
-            <a:spLocks noGrp="1"/>
-          </p:cNvSpPr>
-          <p:nvPr>
-            <p:ph idx="33"/>
-          </p:nvPr>
-        </p:nvSpPr>
-        <p:spPr/>
-        <p:txBody>
-          <a:bodyPr/>
-          <a:lstStyle/>
-          <a:p>
-            <a:endParaRPr lang="en-US"/>
-          </a:p>
-        </p:txBody>
-      </p:sp>
-      <p:sp>
-        <p:nvSpPr>
-          <p:cNvPr id="12" name="Content Placeholder 11">
-            <a:extLst>
-              <a:ext uri="{FF2B5EF4-FFF2-40B4-BE49-F238E27FC236}">
-                <a16:creationId xmlns:a16="http://schemas.microsoft.com/office/drawing/2014/main" id="{B55DEF60-831E-9BD4-D2E4-3ED99D9E2F4B}"/>
-              </a:ext>
-            </a:extLst>
-          </p:cNvPr>
-          <p:cNvSpPr>
-            <a:spLocks noGrp="1"/>
-          </p:cNvSpPr>
-          <p:nvPr>
-            <p:ph idx="34"/>
-          </p:nvPr>
-        </p:nvSpPr>
-        <p:spPr/>
-        <p:txBody>
-          <a:bodyPr/>
-          <a:lstStyle/>
-          <a:p>
-            <a:endParaRPr lang="en-US"/>
-          </a:p>
-        </p:txBody>
-      </p:sp>
-      <p:sp>
-        <p:nvSpPr>
-          <p:cNvPr id="13" name="Chart Placeholder 12">
-            <a:extLst>
-              <a:ext uri="{FF2B5EF4-FFF2-40B4-BE49-F238E27FC236}">
-                <a16:creationId xmlns:a16="http://schemas.microsoft.com/office/drawing/2014/main" id="{F32F01DA-A3B4-71E7-014C-A5D0054CAE3E}"/>
-              </a:ext>
-            </a:extLst>
-          </p:cNvPr>
-          <p:cNvSpPr>
-            <a:spLocks noGrp="1"/>
-          </p:cNvSpPr>
-          <p:nvPr>
-            <p:ph type="chart" sz="quarter" idx="37"/>
-          </p:nvPr>
-        </p:nvSpPr>
-        <p:spPr/>
-        <p:txBody>
-          <a:bodyPr/>
-          <a:lstStyle/>
-          <a:p>
-            <a:endParaRPr lang="en-US"/>
-          </a:p>
-        </p:txBody>
-      </p:sp>
-      <p:sp>
-        <p:nvSpPr>
-          <p:cNvPr id="14" name="Picture Placeholder 13">
-            <a:extLst>
-              <a:ext uri="{FF2B5EF4-FFF2-40B4-BE49-F238E27FC236}">
-                <a16:creationId xmlns:a16="http://schemas.microsoft.com/office/drawing/2014/main" id="{563E6F39-9699-D14D-0061-2E9889364D19}"/>
-              </a:ext>
-            </a:extLst>
-          </p:cNvPr>
-          <p:cNvSpPr>
-            <a:spLocks noGrp="1"/>
-          </p:cNvSpPr>
-          <p:nvPr>
-            <p:ph type="pic" sz="quarter" idx="41"/>
-          </p:nvPr>
-        </p:nvSpPr>
-        <p:spPr/>
-        <p:txBody>
-          <a:bodyPr/>
-          <a:lstStyle/>
-          <a:p>
-            <a:endParaRPr lang="en-US"/>
-          </a:p>
-        </p:txBody>
-      </p:sp>
-      <p:sp>
-        <p:nvSpPr>
-          <p:cNvPr id="15" name="Picture Placeholder 14">
-            <a:extLst>
-              <a:ext uri="{FF2B5EF4-FFF2-40B4-BE49-F238E27FC236}">
-                <a16:creationId xmlns:a16="http://schemas.microsoft.com/office/drawing/2014/main" id="{3C34DEA0-C21F-02A3-78C6-05DBD8065B54}"/>
-              </a:ext>
-            </a:extLst>
-          </p:cNvPr>
-          <p:cNvSpPr>
-            <a:spLocks noGrp="1"/>
-          </p:cNvSpPr>
-          <p:nvPr>
-            <p:ph type="pic" sz="quarter" idx="42"/>
-          </p:nvPr>
-        </p:nvSpPr>
-        <p:spPr/>
-        <p:txBody>
-          <a:bodyPr/>
-          <a:lstStyle/>
-          <a:p>
-            <a:endParaRPr lang="en-US"/>
-          </a:p>
-        </p:txBody>
-      </p:sp>
-      <p:sp>
-        <p:nvSpPr>
-          <p:cNvPr id="16" name="Picture Placeholder 15">
-            <a:extLst>
-              <a:ext uri="{FF2B5EF4-FFF2-40B4-BE49-F238E27FC236}">
-                <a16:creationId xmlns:a16="http://schemas.microsoft.com/office/drawing/2014/main" id="{EE614859-14D4-D154-2224-C26AF5795647}"/>
-              </a:ext>
-            </a:extLst>
-          </p:cNvPr>
-          <p:cNvSpPr>
-            <a:spLocks noGrp="1"/>
-          </p:cNvSpPr>
-          <p:nvPr>
-            <p:ph type="pic" sz="quarter" idx="43"/>
-          </p:nvPr>
-        </p:nvSpPr>
-        <p:spPr/>
-        <p:txBody>
-          <a:bodyPr/>
-          <a:lstStyle/>
-          <a:p>
-            <a:endParaRPr lang="en-US"/>
-          </a:p>
-        </p:txBody>
-      </p:sp>
-      <p:sp>
-        <p:nvSpPr>
-          <p:cNvPr id="17" name="Picture Placeholder 16">
-            <a:extLst>
-              <a:ext uri="{FF2B5EF4-FFF2-40B4-BE49-F238E27FC236}">
-                <a16:creationId xmlns:a16="http://schemas.microsoft.com/office/drawing/2014/main" id="{4B88C624-34F5-7CD4-DC67-ED9154607957}"/>
-              </a:ext>
-            </a:extLst>
-          </p:cNvPr>
-          <p:cNvSpPr>
-            <a:spLocks noGrp="1"/>
-          </p:cNvSpPr>
-          <p:nvPr>
-            <p:ph type="pic" sz="quarter" idx="44"/>
-          </p:nvPr>
-        </p:nvSpPr>
-        <p:spPr/>
-        <p:txBody>
-          <a:bodyPr/>
-          <a:lstStyle/>
-          <a:p>
-            <a:endParaRPr lang="en-US"/>
-          </a:p>
-        </p:txBody>
-      </p:sp>
-      <p:sp>
-        <p:nvSpPr>
-          <p:cNvPr id="18" name="Title 17">
-            <a:extLst>
-              <a:ext uri="{FF2B5EF4-FFF2-40B4-BE49-F238E27FC236}">
-                <a16:creationId xmlns:a16="http://schemas.microsoft.com/office/drawing/2014/main" id="{46D509EF-8F60-72FD-873E-4D78AE814D47}"/>
-              </a:ext>
-            </a:extLst>
-          </p:cNvPr>
-          <p:cNvSpPr>
-            <a:spLocks noGrp="1"/>
-          </p:cNvSpPr>
-          <p:nvPr>
-            <p:ph type="title"/>
-          </p:nvPr>
-        </p:nvSpPr>
-        <p:spPr/>
-        <p:txBody>
-          <a:bodyPr/>
-          <a:lstStyle/>
-          <a:p>
-            <a:endParaRPr lang="en-US"/>
-          </a:p>
-        </p:txBody>
-      </p:sp>
-      <p:sp>
-        <p:nvSpPr>
-          <p:cNvPr id="19" name="Text Placeholder 18">
-            <a:extLst>
-              <a:ext uri="{FF2B5EF4-FFF2-40B4-BE49-F238E27FC236}">
-                <a16:creationId xmlns:a16="http://schemas.microsoft.com/office/drawing/2014/main" id="{0E13EF9F-9CC0-F945-9BC1-2E6133BC7E38}"/>
-              </a:ext>
-            </a:extLst>
-          </p:cNvPr>
-          <p:cNvSpPr>
-            <a:spLocks noGrp="1"/>
-          </p:cNvSpPr>
-          <p:nvPr>
-            <p:ph type="body" sz="quarter" idx="21"/>
-          </p:nvPr>
-        </p:nvSpPr>
-        <p:spPr/>
-        <p:txBody>
-          <a:bodyPr/>
-          <a:lstStyle/>
-          <a:p>
-            <a:endParaRPr lang="en-US"/>
-          </a:p>
-        </p:txBody>
-      </p:sp>
-      <p:sp>
-        <p:nvSpPr>
-          <p:cNvPr id="20" name="Picture Placeholder 19">
-            <a:extLst>
-              <a:ext uri="{FF2B5EF4-FFF2-40B4-BE49-F238E27FC236}">
-                <a16:creationId xmlns:a16="http://schemas.microsoft.com/office/drawing/2014/main" id="{BAFCA535-336B-C731-4066-CB8E40EB945E}"/>
-              </a:ext>
-            </a:extLst>
-          </p:cNvPr>
-          <p:cNvSpPr>
-            <a:spLocks noGrp="1"/>
-          </p:cNvSpPr>
-          <p:nvPr>
-            <p:ph type="pic" sz="quarter" idx="23"/>
           </p:nvPr>
         </p:nvSpPr>
         <p:spPr/>
@@ -7926,7 +8045,135 @@
       </p:grpSpPr>
       <p:sp>
         <p:nvSpPr>
-          <p:cNvPr id="2" name="Content Placeholder 1">
+          <p:cNvPr id="11" name="Title 10">
+            <a:extLst>
+              <a:ext uri="{FF2B5EF4-FFF2-40B4-BE49-F238E27FC236}">
+                <a16:creationId xmlns:a16="http://schemas.microsoft.com/office/drawing/2014/main" id="{8366F89C-D4F8-D8DF-F0A1-C4BA075CEBED}"/>
+              </a:ext>
+            </a:extLst>
+          </p:cNvPr>
+          <p:cNvSpPr>
+            <a:spLocks noGrp="1"/>
+          </p:cNvSpPr>
+          <p:nvPr>
+            <p:ph type="title"/>
+          </p:nvPr>
+        </p:nvSpPr>
+        <p:spPr/>
+        <p:txBody>
+          <a:bodyPr/>
+          <a:lstStyle/>
+          <a:p>
+            <a:r>
+              <a:rPr lang="en-US"/>
+              <a:t>42x42 square poster template — layout 5</a:t>
+            </a:r>
+          </a:p>
+        </p:txBody>
+      </p:sp>
+      <p:sp>
+        <p:nvSpPr>
+          <p:cNvPr id="13" name="Logo or QRC">
+            <a:extLst>
+              <a:ext uri="{FF2B5EF4-FFF2-40B4-BE49-F238E27FC236}">
+                <a16:creationId xmlns:a16="http://schemas.microsoft.com/office/drawing/2014/main" id="{B480127E-265E-1172-3304-21BE1DC21AB3}"/>
+              </a:ext>
+            </a:extLst>
+          </p:cNvPr>
+          <p:cNvSpPr>
+            <a:spLocks noGrp="1"/>
+          </p:cNvSpPr>
+          <p:nvPr>
+            <p:ph type="pic" sz="quarter" idx="23"/>
+          </p:nvPr>
+        </p:nvSpPr>
+        <p:spPr/>
+        <p:txBody>
+          <a:bodyPr/>
+          <a:lstStyle/>
+          <a:p>
+            <a:endParaRPr lang="en-US"/>
+          </a:p>
+        </p:txBody>
+      </p:sp>
+      <p:sp>
+        <p:nvSpPr>
+          <p:cNvPr id="12" name="Author(s): 60pt  Affiliation(s): 48pt">
+            <a:extLst>
+              <a:ext uri="{FF2B5EF4-FFF2-40B4-BE49-F238E27FC236}">
+                <a16:creationId xmlns:a16="http://schemas.microsoft.com/office/drawing/2014/main" id="{ADBCDC97-5EB8-756E-A8AF-B9FE7A978079}"/>
+              </a:ext>
+            </a:extLst>
+          </p:cNvPr>
+          <p:cNvSpPr>
+            <a:spLocks noGrp="1"/>
+          </p:cNvSpPr>
+          <p:nvPr>
+            <p:ph type="body" sz="quarter" idx="21"/>
+          </p:nvPr>
+        </p:nvSpPr>
+        <p:spPr/>
+        <p:txBody>
+          <a:bodyPr/>
+          <a:lstStyle/>
+          <a:p>
+            <a:endParaRPr lang="en-US"/>
+          </a:p>
+        </p:txBody>
+      </p:sp>
+      <p:sp>
+        <p:nvSpPr>
+          <p:cNvPr id="3" name="Heading: 60pt bold">
+            <a:extLst>
+              <a:ext uri="{FF2B5EF4-FFF2-40B4-BE49-F238E27FC236}">
+                <a16:creationId xmlns:a16="http://schemas.microsoft.com/office/drawing/2014/main" id="{528AE1E4-7A93-D00E-BFBF-7CC63CEFB3B9}"/>
+              </a:ext>
+            </a:extLst>
+          </p:cNvPr>
+          <p:cNvSpPr>
+            <a:spLocks noGrp="1"/>
+          </p:cNvSpPr>
+          <p:nvPr>
+            <p:ph idx="1"/>
+          </p:nvPr>
+        </p:nvSpPr>
+        <p:spPr/>
+        <p:txBody>
+          <a:bodyPr/>
+          <a:lstStyle/>
+          <a:p>
+            <a:endParaRPr lang="en-US"/>
+          </a:p>
+        </p:txBody>
+      </p:sp>
+      <p:sp>
+        <p:nvSpPr>
+          <p:cNvPr id="8" name="Insert content here: 36pt">
+            <a:extLst>
+              <a:ext uri="{FF2B5EF4-FFF2-40B4-BE49-F238E27FC236}">
+                <a16:creationId xmlns:a16="http://schemas.microsoft.com/office/drawing/2014/main" id="{1896326D-4CBE-1E7B-CC20-146F01FEF972}"/>
+              </a:ext>
+            </a:extLst>
+          </p:cNvPr>
+          <p:cNvSpPr>
+            <a:spLocks noGrp="1"/>
+          </p:cNvSpPr>
+          <p:nvPr>
+            <p:ph type="body" sz="quarter" idx="22"/>
+          </p:nvPr>
+        </p:nvSpPr>
+        <p:spPr/>
+        <p:txBody>
+          <a:bodyPr/>
+          <a:lstStyle/>
+          <a:p>
+            <a:endParaRPr lang="en-US"/>
+          </a:p>
+        </p:txBody>
+      </p:sp>
+      <p:sp>
+        <p:nvSpPr>
+          <p:cNvPr id="2" name="Heading: 60pt bold">
             <a:extLst>
               <a:ext uri="{FF2B5EF4-FFF2-40B4-BE49-F238E27FC236}">
                 <a16:creationId xmlns:a16="http://schemas.microsoft.com/office/drawing/2014/main" id="{FBBD6529-1FFF-3330-EBA9-51FFCF6D99E4}"/>
@@ -7951,18 +8198,18 @@
       </p:sp>
       <p:sp>
         <p:nvSpPr>
-          <p:cNvPr id="3" name="Content Placeholder 2">
-            <a:extLst>
-              <a:ext uri="{FF2B5EF4-FFF2-40B4-BE49-F238E27FC236}">
-                <a16:creationId xmlns:a16="http://schemas.microsoft.com/office/drawing/2014/main" id="{528AE1E4-7A93-D00E-BFBF-7CC63CEFB3B9}"/>
-              </a:ext>
-            </a:extLst>
-          </p:cNvPr>
-          <p:cNvSpPr>
-            <a:spLocks noGrp="1"/>
-          </p:cNvSpPr>
-          <p:nvPr>
-            <p:ph idx="1"/>
+          <p:cNvPr id="7" name="Insert content here: 36pt">
+            <a:extLst>
+              <a:ext uri="{FF2B5EF4-FFF2-40B4-BE49-F238E27FC236}">
+                <a16:creationId xmlns:a16="http://schemas.microsoft.com/office/drawing/2014/main" id="{C98889EA-97EE-7CB8-9070-9097CA3D998A}"/>
+              </a:ext>
+            </a:extLst>
+          </p:cNvPr>
+          <p:cNvSpPr>
+            <a:spLocks noGrp="1"/>
+          </p:cNvSpPr>
+          <p:nvPr>
+            <p:ph type="body" sz="quarter" idx="25"/>
           </p:nvPr>
         </p:nvSpPr>
         <p:spPr/>
@@ -7976,7 +8223,457 @@
       </p:sp>
       <p:sp>
         <p:nvSpPr>
-          <p:cNvPr id="4" name="Text Placeholder 3">
+          <p:cNvPr id="22" name="Heading: 60pt bold">
+            <a:extLst>
+              <a:ext uri="{FF2B5EF4-FFF2-40B4-BE49-F238E27FC236}">
+                <a16:creationId xmlns:a16="http://schemas.microsoft.com/office/drawing/2014/main" id="{904E5329-DD23-B3BC-51D5-FD1DB6A1C35F}"/>
+              </a:ext>
+            </a:extLst>
+          </p:cNvPr>
+          <p:cNvSpPr>
+            <a:spLocks noGrp="1"/>
+          </p:cNvSpPr>
+          <p:nvPr>
+            <p:ph idx="53"/>
+          </p:nvPr>
+        </p:nvSpPr>
+        <p:spPr/>
+        <p:txBody>
+          <a:bodyPr/>
+          <a:lstStyle/>
+          <a:p>
+            <a:endParaRPr lang="en-US"/>
+          </a:p>
+        </p:txBody>
+      </p:sp>
+      <p:sp>
+        <p:nvSpPr>
+          <p:cNvPr id="21" name="Insert content here: 36pt">
+            <a:extLst>
+              <a:ext uri="{FF2B5EF4-FFF2-40B4-BE49-F238E27FC236}">
+                <a16:creationId xmlns:a16="http://schemas.microsoft.com/office/drawing/2014/main" id="{ED2D363C-1413-866B-7C22-1E7BA3054AD8}"/>
+              </a:ext>
+            </a:extLst>
+          </p:cNvPr>
+          <p:cNvSpPr>
+            <a:spLocks noGrp="1"/>
+          </p:cNvSpPr>
+          <p:nvPr>
+            <p:ph type="body" sz="quarter" idx="52"/>
+          </p:nvPr>
+        </p:nvSpPr>
+        <p:spPr/>
+        <p:txBody>
+          <a:bodyPr/>
+          <a:lstStyle/>
+          <a:p>
+            <a:endParaRPr lang="en-US"/>
+          </a:p>
+        </p:txBody>
+      </p:sp>
+      <p:sp>
+        <p:nvSpPr>
+          <p:cNvPr id="27" name="Picture Placeholder 26">
+            <a:extLst>
+              <a:ext uri="{FF2B5EF4-FFF2-40B4-BE49-F238E27FC236}">
+                <a16:creationId xmlns:a16="http://schemas.microsoft.com/office/drawing/2014/main" id="{2B0EA12A-4A4D-583C-8653-A27DC9026C24}"/>
+              </a:ext>
+            </a:extLst>
+          </p:cNvPr>
+          <p:cNvSpPr>
+            <a:spLocks noGrp="1"/>
+          </p:cNvSpPr>
+          <p:nvPr>
+            <p:ph type="pic" sz="quarter" idx="58"/>
+          </p:nvPr>
+        </p:nvSpPr>
+        <p:spPr/>
+        <p:txBody>
+          <a:bodyPr/>
+          <a:lstStyle/>
+          <a:p>
+            <a:endParaRPr lang="en-US"/>
+          </a:p>
+        </p:txBody>
+      </p:sp>
+      <p:sp>
+        <p:nvSpPr>
+          <p:cNvPr id="26" name="Picture Placeholder 25">
+            <a:extLst>
+              <a:ext uri="{FF2B5EF4-FFF2-40B4-BE49-F238E27FC236}">
+                <a16:creationId xmlns:a16="http://schemas.microsoft.com/office/drawing/2014/main" id="{153250C3-8DBF-CEF7-1990-24B6CCA2FE7F}"/>
+              </a:ext>
+            </a:extLst>
+          </p:cNvPr>
+          <p:cNvSpPr>
+            <a:spLocks noGrp="1"/>
+          </p:cNvSpPr>
+          <p:nvPr>
+            <p:ph type="pic" sz="quarter" idx="57"/>
+          </p:nvPr>
+        </p:nvSpPr>
+        <p:spPr/>
+        <p:txBody>
+          <a:bodyPr/>
+          <a:lstStyle/>
+          <a:p>
+            <a:endParaRPr lang="en-US"/>
+          </a:p>
+        </p:txBody>
+      </p:sp>
+      <p:sp>
+        <p:nvSpPr>
+          <p:cNvPr id="23" name="Click to add figure caption">
+            <a:extLst>
+              <a:ext uri="{FF2B5EF4-FFF2-40B4-BE49-F238E27FC236}">
+                <a16:creationId xmlns:a16="http://schemas.microsoft.com/office/drawing/2014/main" id="{A40EBDA4-A3CE-2DDB-ABA9-B5EDAC1D83E3}"/>
+              </a:ext>
+            </a:extLst>
+          </p:cNvPr>
+          <p:cNvSpPr>
+            <a:spLocks noGrp="1"/>
+          </p:cNvSpPr>
+          <p:nvPr>
+            <p:ph type="chart" sz="quarter" idx="54"/>
+          </p:nvPr>
+        </p:nvSpPr>
+        <p:spPr/>
+        <p:txBody>
+          <a:bodyPr/>
+          <a:lstStyle/>
+          <a:p>
+            <a:endParaRPr lang="en-US"/>
+          </a:p>
+        </p:txBody>
+      </p:sp>
+      <p:sp>
+        <p:nvSpPr>
+          <p:cNvPr id="25" name="Picture Placeholder 24">
+            <a:extLst>
+              <a:ext uri="{FF2B5EF4-FFF2-40B4-BE49-F238E27FC236}">
+                <a16:creationId xmlns:a16="http://schemas.microsoft.com/office/drawing/2014/main" id="{17129FEE-6351-82F2-D285-F4BB28F638E9}"/>
+              </a:ext>
+            </a:extLst>
+          </p:cNvPr>
+          <p:cNvSpPr>
+            <a:spLocks noGrp="1"/>
+          </p:cNvSpPr>
+          <p:nvPr>
+            <p:ph type="pic" sz="quarter" idx="56"/>
+          </p:nvPr>
+        </p:nvSpPr>
+        <p:spPr/>
+        <p:txBody>
+          <a:bodyPr/>
+          <a:lstStyle/>
+          <a:p>
+            <a:endParaRPr lang="en-US"/>
+          </a:p>
+        </p:txBody>
+      </p:sp>
+      <p:sp>
+        <p:nvSpPr>
+          <p:cNvPr id="24" name="Picture Placeholder 23">
+            <a:extLst>
+              <a:ext uri="{FF2B5EF4-FFF2-40B4-BE49-F238E27FC236}">
+                <a16:creationId xmlns:a16="http://schemas.microsoft.com/office/drawing/2014/main" id="{DC52B078-C312-CD3B-9908-1C36FF8B57A8}"/>
+              </a:ext>
+            </a:extLst>
+          </p:cNvPr>
+          <p:cNvSpPr>
+            <a:spLocks noGrp="1"/>
+          </p:cNvSpPr>
+          <p:nvPr>
+            <p:ph type="pic" sz="quarter" idx="55"/>
+          </p:nvPr>
+        </p:nvSpPr>
+        <p:spPr/>
+        <p:txBody>
+          <a:bodyPr/>
+          <a:lstStyle/>
+          <a:p>
+            <a:endParaRPr lang="en-US"/>
+          </a:p>
+        </p:txBody>
+      </p:sp>
+      <p:sp>
+        <p:nvSpPr>
+          <p:cNvPr id="15" name="Heading: 60pt bold">
+            <a:extLst>
+              <a:ext uri="{FF2B5EF4-FFF2-40B4-BE49-F238E27FC236}">
+                <a16:creationId xmlns:a16="http://schemas.microsoft.com/office/drawing/2014/main" id="{87C0B2C8-CDDC-77AE-817E-E79BC7158DA5}"/>
+              </a:ext>
+            </a:extLst>
+          </p:cNvPr>
+          <p:cNvSpPr>
+            <a:spLocks noGrp="1"/>
+          </p:cNvSpPr>
+          <p:nvPr>
+            <p:ph idx="46"/>
+          </p:nvPr>
+        </p:nvSpPr>
+        <p:spPr/>
+        <p:txBody>
+          <a:bodyPr/>
+          <a:lstStyle/>
+          <a:p>
+            <a:endParaRPr lang="en-US"/>
+          </a:p>
+        </p:txBody>
+      </p:sp>
+      <p:sp>
+        <p:nvSpPr>
+          <p:cNvPr id="14" name="Insert content here: 36pt">
+            <a:extLst>
+              <a:ext uri="{FF2B5EF4-FFF2-40B4-BE49-F238E27FC236}">
+                <a16:creationId xmlns:a16="http://schemas.microsoft.com/office/drawing/2014/main" id="{9169B5A8-CCCC-E1C5-097D-D13735C0BAFA}"/>
+              </a:ext>
+            </a:extLst>
+          </p:cNvPr>
+          <p:cNvSpPr>
+            <a:spLocks noGrp="1"/>
+          </p:cNvSpPr>
+          <p:nvPr>
+            <p:ph type="body" sz="quarter" idx="45"/>
+          </p:nvPr>
+        </p:nvSpPr>
+        <p:spPr/>
+        <p:txBody>
+          <a:bodyPr/>
+          <a:lstStyle/>
+          <a:p>
+            <a:endParaRPr lang="en-US"/>
+          </a:p>
+        </p:txBody>
+      </p:sp>
+      <p:sp>
+        <p:nvSpPr>
+          <p:cNvPr id="20" name="Picture Placeholder 19">
+            <a:extLst>
+              <a:ext uri="{FF2B5EF4-FFF2-40B4-BE49-F238E27FC236}">
+                <a16:creationId xmlns:a16="http://schemas.microsoft.com/office/drawing/2014/main" id="{ACF484B4-3569-F396-77AD-2EB8A6DE46FC}"/>
+              </a:ext>
+            </a:extLst>
+          </p:cNvPr>
+          <p:cNvSpPr>
+            <a:spLocks noGrp="1"/>
+          </p:cNvSpPr>
+          <p:nvPr>
+            <p:ph type="pic" sz="quarter" idx="51"/>
+          </p:nvPr>
+        </p:nvSpPr>
+        <p:spPr/>
+        <p:txBody>
+          <a:bodyPr/>
+          <a:lstStyle/>
+          <a:p>
+            <a:endParaRPr lang="en-US"/>
+          </a:p>
+        </p:txBody>
+      </p:sp>
+      <p:sp>
+        <p:nvSpPr>
+          <p:cNvPr id="19" name="Picture Placeholder 18">
+            <a:extLst>
+              <a:ext uri="{FF2B5EF4-FFF2-40B4-BE49-F238E27FC236}">
+                <a16:creationId xmlns:a16="http://schemas.microsoft.com/office/drawing/2014/main" id="{22E1D3BB-46DD-6622-6128-D7CEF17F86F2}"/>
+              </a:ext>
+            </a:extLst>
+          </p:cNvPr>
+          <p:cNvSpPr>
+            <a:spLocks noGrp="1"/>
+          </p:cNvSpPr>
+          <p:nvPr>
+            <p:ph type="pic" sz="quarter" idx="50"/>
+          </p:nvPr>
+        </p:nvSpPr>
+        <p:spPr/>
+        <p:txBody>
+          <a:bodyPr/>
+          <a:lstStyle/>
+          <a:p>
+            <a:endParaRPr lang="en-US"/>
+          </a:p>
+        </p:txBody>
+      </p:sp>
+      <p:sp>
+        <p:nvSpPr>
+          <p:cNvPr id="16" name="Click to add figure caption">
+            <a:extLst>
+              <a:ext uri="{FF2B5EF4-FFF2-40B4-BE49-F238E27FC236}">
+                <a16:creationId xmlns:a16="http://schemas.microsoft.com/office/drawing/2014/main" id="{8DB27602-27CB-2FA6-3D81-078C5AD172B5}"/>
+              </a:ext>
+            </a:extLst>
+          </p:cNvPr>
+          <p:cNvSpPr>
+            <a:spLocks noGrp="1"/>
+          </p:cNvSpPr>
+          <p:nvPr>
+            <p:ph type="chart" sz="quarter" idx="47"/>
+          </p:nvPr>
+        </p:nvSpPr>
+        <p:spPr/>
+        <p:txBody>
+          <a:bodyPr/>
+          <a:lstStyle/>
+          <a:p>
+            <a:endParaRPr lang="en-US"/>
+          </a:p>
+        </p:txBody>
+      </p:sp>
+      <p:sp>
+        <p:nvSpPr>
+          <p:cNvPr id="18" name="Picture Placeholder 17">
+            <a:extLst>
+              <a:ext uri="{FF2B5EF4-FFF2-40B4-BE49-F238E27FC236}">
+                <a16:creationId xmlns:a16="http://schemas.microsoft.com/office/drawing/2014/main" id="{AA9E2B08-73A7-87AF-8394-33672D53CF91}"/>
+              </a:ext>
+            </a:extLst>
+          </p:cNvPr>
+          <p:cNvSpPr>
+            <a:spLocks noGrp="1"/>
+          </p:cNvSpPr>
+          <p:nvPr>
+            <p:ph type="pic" sz="quarter" idx="49"/>
+          </p:nvPr>
+        </p:nvSpPr>
+        <p:spPr/>
+        <p:txBody>
+          <a:bodyPr/>
+          <a:lstStyle/>
+          <a:p>
+            <a:endParaRPr lang="en-US"/>
+          </a:p>
+        </p:txBody>
+      </p:sp>
+      <p:sp>
+        <p:nvSpPr>
+          <p:cNvPr id="17" name="Picture Placeholder 16">
+            <a:extLst>
+              <a:ext uri="{FF2B5EF4-FFF2-40B4-BE49-F238E27FC236}">
+                <a16:creationId xmlns:a16="http://schemas.microsoft.com/office/drawing/2014/main" id="{9D9CC795-4DE7-35F0-BB75-BF260CB05B9B}"/>
+              </a:ext>
+            </a:extLst>
+          </p:cNvPr>
+          <p:cNvSpPr>
+            <a:spLocks noGrp="1"/>
+          </p:cNvSpPr>
+          <p:nvPr>
+            <p:ph type="pic" sz="quarter" idx="48"/>
+          </p:nvPr>
+        </p:nvSpPr>
+        <p:spPr/>
+        <p:txBody>
+          <a:bodyPr/>
+          <a:lstStyle/>
+          <a:p>
+            <a:endParaRPr lang="en-US"/>
+          </a:p>
+        </p:txBody>
+      </p:sp>
+      <p:sp>
+        <p:nvSpPr>
+          <p:cNvPr id="9" name="Heading: 60pt bold">
+            <a:extLst>
+              <a:ext uri="{FF2B5EF4-FFF2-40B4-BE49-F238E27FC236}">
+                <a16:creationId xmlns:a16="http://schemas.microsoft.com/office/drawing/2014/main" id="{F38FA4C8-FE65-DBAA-8631-4B65615EED40}"/>
+              </a:ext>
+            </a:extLst>
+          </p:cNvPr>
+          <p:cNvSpPr>
+            <a:spLocks noGrp="1"/>
+          </p:cNvSpPr>
+          <p:nvPr>
+            <p:ph idx="33"/>
+          </p:nvPr>
+        </p:nvSpPr>
+        <p:spPr/>
+        <p:txBody>
+          <a:bodyPr/>
+          <a:lstStyle/>
+          <a:p>
+            <a:endParaRPr lang="en-US"/>
+          </a:p>
+        </p:txBody>
+      </p:sp>
+      <p:sp>
+        <p:nvSpPr>
+          <p:cNvPr id="6" name="Insert content here: 36pt">
+            <a:extLst>
+              <a:ext uri="{FF2B5EF4-FFF2-40B4-BE49-F238E27FC236}">
+                <a16:creationId xmlns:a16="http://schemas.microsoft.com/office/drawing/2014/main" id="{906DBC6E-94D4-8CC8-077C-54AA7E63103C}"/>
+              </a:ext>
+            </a:extLst>
+          </p:cNvPr>
+          <p:cNvSpPr>
+            <a:spLocks noGrp="1"/>
+          </p:cNvSpPr>
+          <p:nvPr>
+            <p:ph type="body" sz="quarter" idx="28"/>
+          </p:nvPr>
+        </p:nvSpPr>
+        <p:spPr/>
+        <p:txBody>
+          <a:bodyPr/>
+          <a:lstStyle/>
+          <a:p>
+            <a:endParaRPr lang="en-US"/>
+          </a:p>
+        </p:txBody>
+      </p:sp>
+      <p:sp>
+        <p:nvSpPr>
+          <p:cNvPr id="10" name="Heading: 60pt bold">
+            <a:extLst>
+              <a:ext uri="{FF2B5EF4-FFF2-40B4-BE49-F238E27FC236}">
+                <a16:creationId xmlns:a16="http://schemas.microsoft.com/office/drawing/2014/main" id="{0E5FE967-D92A-6DB7-9545-9D921E6CBF4D}"/>
+              </a:ext>
+            </a:extLst>
+          </p:cNvPr>
+          <p:cNvSpPr>
+            <a:spLocks noGrp="1"/>
+          </p:cNvSpPr>
+          <p:nvPr>
+            <p:ph idx="34"/>
+          </p:nvPr>
+        </p:nvSpPr>
+        <p:spPr/>
+        <p:txBody>
+          <a:bodyPr/>
+          <a:lstStyle/>
+          <a:p>
+            <a:endParaRPr lang="en-US"/>
+          </a:p>
+        </p:txBody>
+      </p:sp>
+      <p:sp>
+        <p:nvSpPr>
+          <p:cNvPr id="5" name="Insert content here: 36pt">
+            <a:extLst>
+              <a:ext uri="{FF2B5EF4-FFF2-40B4-BE49-F238E27FC236}">
+                <a16:creationId xmlns:a16="http://schemas.microsoft.com/office/drawing/2014/main" id="{76DF7F53-E801-052F-F98C-52971F4EB7D5}"/>
+              </a:ext>
+            </a:extLst>
+          </p:cNvPr>
+          <p:cNvSpPr>
+            <a:spLocks noGrp="1"/>
+          </p:cNvSpPr>
+          <p:nvPr>
+            <p:ph type="body" sz="quarter" idx="30"/>
+          </p:nvPr>
+        </p:nvSpPr>
+        <p:spPr/>
+        <p:txBody>
+          <a:bodyPr/>
+          <a:lstStyle/>
+          <a:p>
+            <a:endParaRPr lang="en-US"/>
+          </a:p>
+        </p:txBody>
+      </p:sp>
+      <p:sp>
+        <p:nvSpPr>
+          <p:cNvPr id="4" name="Insert acknowledgements / references here: 30pt">
             <a:extLst>
               <a:ext uri="{FF2B5EF4-FFF2-40B4-BE49-F238E27FC236}">
                 <a16:creationId xmlns:a16="http://schemas.microsoft.com/office/drawing/2014/main" id="{E3C87E53-A62C-DB56-206F-6D955683EC9A}"/>
@@ -7988,581 +8685,6 @@
           </p:cNvSpPr>
           <p:nvPr>
             <p:ph type="body" sz="quarter" idx="31"/>
-          </p:nvPr>
-        </p:nvSpPr>
-        <p:spPr/>
-        <p:txBody>
-          <a:bodyPr/>
-          <a:lstStyle/>
-          <a:p>
-            <a:endParaRPr lang="en-US"/>
-          </a:p>
-        </p:txBody>
-      </p:sp>
-      <p:sp>
-        <p:nvSpPr>
-          <p:cNvPr id="5" name="Text Placeholder 4">
-            <a:extLst>
-              <a:ext uri="{FF2B5EF4-FFF2-40B4-BE49-F238E27FC236}">
-                <a16:creationId xmlns:a16="http://schemas.microsoft.com/office/drawing/2014/main" id="{76DF7F53-E801-052F-F98C-52971F4EB7D5}"/>
-              </a:ext>
-            </a:extLst>
-          </p:cNvPr>
-          <p:cNvSpPr>
-            <a:spLocks noGrp="1"/>
-          </p:cNvSpPr>
-          <p:nvPr>
-            <p:ph type="body" sz="quarter" idx="30"/>
-          </p:nvPr>
-        </p:nvSpPr>
-        <p:spPr/>
-        <p:txBody>
-          <a:bodyPr/>
-          <a:lstStyle/>
-          <a:p>
-            <a:endParaRPr lang="en-US"/>
-          </a:p>
-        </p:txBody>
-      </p:sp>
-      <p:sp>
-        <p:nvSpPr>
-          <p:cNvPr id="6" name="Text Placeholder 5">
-            <a:extLst>
-              <a:ext uri="{FF2B5EF4-FFF2-40B4-BE49-F238E27FC236}">
-                <a16:creationId xmlns:a16="http://schemas.microsoft.com/office/drawing/2014/main" id="{906DBC6E-94D4-8CC8-077C-54AA7E63103C}"/>
-              </a:ext>
-            </a:extLst>
-          </p:cNvPr>
-          <p:cNvSpPr>
-            <a:spLocks noGrp="1"/>
-          </p:cNvSpPr>
-          <p:nvPr>
-            <p:ph type="body" sz="quarter" idx="28"/>
-          </p:nvPr>
-        </p:nvSpPr>
-        <p:spPr/>
-        <p:txBody>
-          <a:bodyPr/>
-          <a:lstStyle/>
-          <a:p>
-            <a:endParaRPr lang="en-US"/>
-          </a:p>
-        </p:txBody>
-      </p:sp>
-      <p:sp>
-        <p:nvSpPr>
-          <p:cNvPr id="7" name="Text Placeholder 6">
-            <a:extLst>
-              <a:ext uri="{FF2B5EF4-FFF2-40B4-BE49-F238E27FC236}">
-                <a16:creationId xmlns:a16="http://schemas.microsoft.com/office/drawing/2014/main" id="{C98889EA-97EE-7CB8-9070-9097CA3D998A}"/>
-              </a:ext>
-            </a:extLst>
-          </p:cNvPr>
-          <p:cNvSpPr>
-            <a:spLocks noGrp="1"/>
-          </p:cNvSpPr>
-          <p:nvPr>
-            <p:ph type="body" sz="quarter" idx="25"/>
-          </p:nvPr>
-        </p:nvSpPr>
-        <p:spPr/>
-        <p:txBody>
-          <a:bodyPr/>
-          <a:lstStyle/>
-          <a:p>
-            <a:endParaRPr lang="en-US"/>
-          </a:p>
-        </p:txBody>
-      </p:sp>
-      <p:sp>
-        <p:nvSpPr>
-          <p:cNvPr id="8" name="Text Placeholder 7">
-            <a:extLst>
-              <a:ext uri="{FF2B5EF4-FFF2-40B4-BE49-F238E27FC236}">
-                <a16:creationId xmlns:a16="http://schemas.microsoft.com/office/drawing/2014/main" id="{1896326D-4CBE-1E7B-CC20-146F01FEF972}"/>
-              </a:ext>
-            </a:extLst>
-          </p:cNvPr>
-          <p:cNvSpPr>
-            <a:spLocks noGrp="1"/>
-          </p:cNvSpPr>
-          <p:nvPr>
-            <p:ph type="body" sz="quarter" idx="22"/>
-          </p:nvPr>
-        </p:nvSpPr>
-        <p:spPr/>
-        <p:txBody>
-          <a:bodyPr/>
-          <a:lstStyle/>
-          <a:p>
-            <a:endParaRPr lang="en-US"/>
-          </a:p>
-        </p:txBody>
-      </p:sp>
-      <p:sp>
-        <p:nvSpPr>
-          <p:cNvPr id="9" name="Content Placeholder 8">
-            <a:extLst>
-              <a:ext uri="{FF2B5EF4-FFF2-40B4-BE49-F238E27FC236}">
-                <a16:creationId xmlns:a16="http://schemas.microsoft.com/office/drawing/2014/main" id="{F38FA4C8-FE65-DBAA-8631-4B65615EED40}"/>
-              </a:ext>
-            </a:extLst>
-          </p:cNvPr>
-          <p:cNvSpPr>
-            <a:spLocks noGrp="1"/>
-          </p:cNvSpPr>
-          <p:nvPr>
-            <p:ph idx="33"/>
-          </p:nvPr>
-        </p:nvSpPr>
-        <p:spPr/>
-        <p:txBody>
-          <a:bodyPr/>
-          <a:lstStyle/>
-          <a:p>
-            <a:endParaRPr lang="en-US"/>
-          </a:p>
-        </p:txBody>
-      </p:sp>
-      <p:sp>
-        <p:nvSpPr>
-          <p:cNvPr id="10" name="Content Placeholder 9">
-            <a:extLst>
-              <a:ext uri="{FF2B5EF4-FFF2-40B4-BE49-F238E27FC236}">
-                <a16:creationId xmlns:a16="http://schemas.microsoft.com/office/drawing/2014/main" id="{0E5FE967-D92A-6DB7-9545-9D921E6CBF4D}"/>
-              </a:ext>
-            </a:extLst>
-          </p:cNvPr>
-          <p:cNvSpPr>
-            <a:spLocks noGrp="1"/>
-          </p:cNvSpPr>
-          <p:nvPr>
-            <p:ph idx="34"/>
-          </p:nvPr>
-        </p:nvSpPr>
-        <p:spPr/>
-        <p:txBody>
-          <a:bodyPr/>
-          <a:lstStyle/>
-          <a:p>
-            <a:endParaRPr lang="en-US"/>
-          </a:p>
-        </p:txBody>
-      </p:sp>
-      <p:sp>
-        <p:nvSpPr>
-          <p:cNvPr id="11" name="Title 10">
-            <a:extLst>
-              <a:ext uri="{FF2B5EF4-FFF2-40B4-BE49-F238E27FC236}">
-                <a16:creationId xmlns:a16="http://schemas.microsoft.com/office/drawing/2014/main" id="{8366F89C-D4F8-D8DF-F0A1-C4BA075CEBED}"/>
-              </a:ext>
-            </a:extLst>
-          </p:cNvPr>
-          <p:cNvSpPr>
-            <a:spLocks noGrp="1"/>
-          </p:cNvSpPr>
-          <p:nvPr>
-            <p:ph type="title"/>
-          </p:nvPr>
-        </p:nvSpPr>
-        <p:spPr/>
-        <p:txBody>
-          <a:bodyPr/>
-          <a:lstStyle/>
-          <a:p>
-            <a:endParaRPr lang="en-US"/>
-          </a:p>
-        </p:txBody>
-      </p:sp>
-      <p:sp>
-        <p:nvSpPr>
-          <p:cNvPr id="12" name="Text Placeholder 11">
-            <a:extLst>
-              <a:ext uri="{FF2B5EF4-FFF2-40B4-BE49-F238E27FC236}">
-                <a16:creationId xmlns:a16="http://schemas.microsoft.com/office/drawing/2014/main" id="{ADBCDC97-5EB8-756E-A8AF-B9FE7A978079}"/>
-              </a:ext>
-            </a:extLst>
-          </p:cNvPr>
-          <p:cNvSpPr>
-            <a:spLocks noGrp="1"/>
-          </p:cNvSpPr>
-          <p:nvPr>
-            <p:ph type="body" sz="quarter" idx="21"/>
-          </p:nvPr>
-        </p:nvSpPr>
-        <p:spPr/>
-        <p:txBody>
-          <a:bodyPr/>
-          <a:lstStyle/>
-          <a:p>
-            <a:endParaRPr lang="en-US"/>
-          </a:p>
-        </p:txBody>
-      </p:sp>
-      <p:sp>
-        <p:nvSpPr>
-          <p:cNvPr id="13" name="Picture Placeholder 12">
-            <a:extLst>
-              <a:ext uri="{FF2B5EF4-FFF2-40B4-BE49-F238E27FC236}">
-                <a16:creationId xmlns:a16="http://schemas.microsoft.com/office/drawing/2014/main" id="{B480127E-265E-1172-3304-21BE1DC21AB3}"/>
-              </a:ext>
-            </a:extLst>
-          </p:cNvPr>
-          <p:cNvSpPr>
-            <a:spLocks noGrp="1"/>
-          </p:cNvSpPr>
-          <p:nvPr>
-            <p:ph type="pic" sz="quarter" idx="23"/>
-          </p:nvPr>
-        </p:nvSpPr>
-        <p:spPr/>
-        <p:txBody>
-          <a:bodyPr/>
-          <a:lstStyle/>
-          <a:p>
-            <a:endParaRPr lang="en-US"/>
-          </a:p>
-        </p:txBody>
-      </p:sp>
-      <p:sp>
-        <p:nvSpPr>
-          <p:cNvPr id="14" name="Text Placeholder 13">
-            <a:extLst>
-              <a:ext uri="{FF2B5EF4-FFF2-40B4-BE49-F238E27FC236}">
-                <a16:creationId xmlns:a16="http://schemas.microsoft.com/office/drawing/2014/main" id="{9169B5A8-CCCC-E1C5-097D-D13735C0BAFA}"/>
-              </a:ext>
-            </a:extLst>
-          </p:cNvPr>
-          <p:cNvSpPr>
-            <a:spLocks noGrp="1"/>
-          </p:cNvSpPr>
-          <p:nvPr>
-            <p:ph type="body" sz="quarter" idx="45"/>
-          </p:nvPr>
-        </p:nvSpPr>
-        <p:spPr/>
-        <p:txBody>
-          <a:bodyPr/>
-          <a:lstStyle/>
-          <a:p>
-            <a:endParaRPr lang="en-US"/>
-          </a:p>
-        </p:txBody>
-      </p:sp>
-      <p:sp>
-        <p:nvSpPr>
-          <p:cNvPr id="15" name="Content Placeholder 14">
-            <a:extLst>
-              <a:ext uri="{FF2B5EF4-FFF2-40B4-BE49-F238E27FC236}">
-                <a16:creationId xmlns:a16="http://schemas.microsoft.com/office/drawing/2014/main" id="{87C0B2C8-CDDC-77AE-817E-E79BC7158DA5}"/>
-              </a:ext>
-            </a:extLst>
-          </p:cNvPr>
-          <p:cNvSpPr>
-            <a:spLocks noGrp="1"/>
-          </p:cNvSpPr>
-          <p:nvPr>
-            <p:ph idx="46"/>
-          </p:nvPr>
-        </p:nvSpPr>
-        <p:spPr/>
-        <p:txBody>
-          <a:bodyPr/>
-          <a:lstStyle/>
-          <a:p>
-            <a:endParaRPr lang="en-US"/>
-          </a:p>
-        </p:txBody>
-      </p:sp>
-      <p:sp>
-        <p:nvSpPr>
-          <p:cNvPr id="16" name="Chart Placeholder 15">
-            <a:extLst>
-              <a:ext uri="{FF2B5EF4-FFF2-40B4-BE49-F238E27FC236}">
-                <a16:creationId xmlns:a16="http://schemas.microsoft.com/office/drawing/2014/main" id="{8DB27602-27CB-2FA6-3D81-078C5AD172B5}"/>
-              </a:ext>
-            </a:extLst>
-          </p:cNvPr>
-          <p:cNvSpPr>
-            <a:spLocks noGrp="1"/>
-          </p:cNvSpPr>
-          <p:nvPr>
-            <p:ph type="chart" sz="quarter" idx="47"/>
-          </p:nvPr>
-        </p:nvSpPr>
-        <p:spPr/>
-        <p:txBody>
-          <a:bodyPr/>
-          <a:lstStyle/>
-          <a:p>
-            <a:endParaRPr lang="en-US"/>
-          </a:p>
-        </p:txBody>
-      </p:sp>
-      <p:sp>
-        <p:nvSpPr>
-          <p:cNvPr id="17" name="Picture Placeholder 16">
-            <a:extLst>
-              <a:ext uri="{FF2B5EF4-FFF2-40B4-BE49-F238E27FC236}">
-                <a16:creationId xmlns:a16="http://schemas.microsoft.com/office/drawing/2014/main" id="{9D9CC795-4DE7-35F0-BB75-BF260CB05B9B}"/>
-              </a:ext>
-            </a:extLst>
-          </p:cNvPr>
-          <p:cNvSpPr>
-            <a:spLocks noGrp="1"/>
-          </p:cNvSpPr>
-          <p:nvPr>
-            <p:ph type="pic" sz="quarter" idx="48"/>
-          </p:nvPr>
-        </p:nvSpPr>
-        <p:spPr/>
-        <p:txBody>
-          <a:bodyPr/>
-          <a:lstStyle/>
-          <a:p>
-            <a:endParaRPr lang="en-US"/>
-          </a:p>
-        </p:txBody>
-      </p:sp>
-      <p:sp>
-        <p:nvSpPr>
-          <p:cNvPr id="18" name="Picture Placeholder 17">
-            <a:extLst>
-              <a:ext uri="{FF2B5EF4-FFF2-40B4-BE49-F238E27FC236}">
-                <a16:creationId xmlns:a16="http://schemas.microsoft.com/office/drawing/2014/main" id="{AA9E2B08-73A7-87AF-8394-33672D53CF91}"/>
-              </a:ext>
-            </a:extLst>
-          </p:cNvPr>
-          <p:cNvSpPr>
-            <a:spLocks noGrp="1"/>
-          </p:cNvSpPr>
-          <p:nvPr>
-            <p:ph type="pic" sz="quarter" idx="49"/>
-          </p:nvPr>
-        </p:nvSpPr>
-        <p:spPr/>
-        <p:txBody>
-          <a:bodyPr/>
-          <a:lstStyle/>
-          <a:p>
-            <a:endParaRPr lang="en-US"/>
-          </a:p>
-        </p:txBody>
-      </p:sp>
-      <p:sp>
-        <p:nvSpPr>
-          <p:cNvPr id="19" name="Picture Placeholder 18">
-            <a:extLst>
-              <a:ext uri="{FF2B5EF4-FFF2-40B4-BE49-F238E27FC236}">
-                <a16:creationId xmlns:a16="http://schemas.microsoft.com/office/drawing/2014/main" id="{22E1D3BB-46DD-6622-6128-D7CEF17F86F2}"/>
-              </a:ext>
-            </a:extLst>
-          </p:cNvPr>
-          <p:cNvSpPr>
-            <a:spLocks noGrp="1"/>
-          </p:cNvSpPr>
-          <p:nvPr>
-            <p:ph type="pic" sz="quarter" idx="50"/>
-          </p:nvPr>
-        </p:nvSpPr>
-        <p:spPr/>
-        <p:txBody>
-          <a:bodyPr/>
-          <a:lstStyle/>
-          <a:p>
-            <a:endParaRPr lang="en-US"/>
-          </a:p>
-        </p:txBody>
-      </p:sp>
-      <p:sp>
-        <p:nvSpPr>
-          <p:cNvPr id="20" name="Picture Placeholder 19">
-            <a:extLst>
-              <a:ext uri="{FF2B5EF4-FFF2-40B4-BE49-F238E27FC236}">
-                <a16:creationId xmlns:a16="http://schemas.microsoft.com/office/drawing/2014/main" id="{ACF484B4-3569-F396-77AD-2EB8A6DE46FC}"/>
-              </a:ext>
-            </a:extLst>
-          </p:cNvPr>
-          <p:cNvSpPr>
-            <a:spLocks noGrp="1"/>
-          </p:cNvSpPr>
-          <p:nvPr>
-            <p:ph type="pic" sz="quarter" idx="51"/>
-          </p:nvPr>
-        </p:nvSpPr>
-        <p:spPr/>
-        <p:txBody>
-          <a:bodyPr/>
-          <a:lstStyle/>
-          <a:p>
-            <a:endParaRPr lang="en-US"/>
-          </a:p>
-        </p:txBody>
-      </p:sp>
-      <p:sp>
-        <p:nvSpPr>
-          <p:cNvPr id="21" name="Text Placeholder 20">
-            <a:extLst>
-              <a:ext uri="{FF2B5EF4-FFF2-40B4-BE49-F238E27FC236}">
-                <a16:creationId xmlns:a16="http://schemas.microsoft.com/office/drawing/2014/main" id="{ED2D363C-1413-866B-7C22-1E7BA3054AD8}"/>
-              </a:ext>
-            </a:extLst>
-          </p:cNvPr>
-          <p:cNvSpPr>
-            <a:spLocks noGrp="1"/>
-          </p:cNvSpPr>
-          <p:nvPr>
-            <p:ph type="body" sz="quarter" idx="52"/>
-          </p:nvPr>
-        </p:nvSpPr>
-        <p:spPr/>
-        <p:txBody>
-          <a:bodyPr/>
-          <a:lstStyle/>
-          <a:p>
-            <a:endParaRPr lang="en-US"/>
-          </a:p>
-        </p:txBody>
-      </p:sp>
-      <p:sp>
-        <p:nvSpPr>
-          <p:cNvPr id="22" name="Content Placeholder 21">
-            <a:extLst>
-              <a:ext uri="{FF2B5EF4-FFF2-40B4-BE49-F238E27FC236}">
-                <a16:creationId xmlns:a16="http://schemas.microsoft.com/office/drawing/2014/main" id="{904E5329-DD23-B3BC-51D5-FD1DB6A1C35F}"/>
-              </a:ext>
-            </a:extLst>
-          </p:cNvPr>
-          <p:cNvSpPr>
-            <a:spLocks noGrp="1"/>
-          </p:cNvSpPr>
-          <p:nvPr>
-            <p:ph idx="53"/>
-          </p:nvPr>
-        </p:nvSpPr>
-        <p:spPr/>
-        <p:txBody>
-          <a:bodyPr/>
-          <a:lstStyle/>
-          <a:p>
-            <a:endParaRPr lang="en-US"/>
-          </a:p>
-        </p:txBody>
-      </p:sp>
-      <p:sp>
-        <p:nvSpPr>
-          <p:cNvPr id="23" name="Chart Placeholder 22">
-            <a:extLst>
-              <a:ext uri="{FF2B5EF4-FFF2-40B4-BE49-F238E27FC236}">
-                <a16:creationId xmlns:a16="http://schemas.microsoft.com/office/drawing/2014/main" id="{A40EBDA4-A3CE-2DDB-ABA9-B5EDAC1D83E3}"/>
-              </a:ext>
-            </a:extLst>
-          </p:cNvPr>
-          <p:cNvSpPr>
-            <a:spLocks noGrp="1"/>
-          </p:cNvSpPr>
-          <p:nvPr>
-            <p:ph type="chart" sz="quarter" idx="54"/>
-          </p:nvPr>
-        </p:nvSpPr>
-        <p:spPr/>
-        <p:txBody>
-          <a:bodyPr/>
-          <a:lstStyle/>
-          <a:p>
-            <a:endParaRPr lang="en-US"/>
-          </a:p>
-        </p:txBody>
-      </p:sp>
-      <p:sp>
-        <p:nvSpPr>
-          <p:cNvPr id="24" name="Picture Placeholder 23">
-            <a:extLst>
-              <a:ext uri="{FF2B5EF4-FFF2-40B4-BE49-F238E27FC236}">
-                <a16:creationId xmlns:a16="http://schemas.microsoft.com/office/drawing/2014/main" id="{DC52B078-C312-CD3B-9908-1C36FF8B57A8}"/>
-              </a:ext>
-            </a:extLst>
-          </p:cNvPr>
-          <p:cNvSpPr>
-            <a:spLocks noGrp="1"/>
-          </p:cNvSpPr>
-          <p:nvPr>
-            <p:ph type="pic" sz="quarter" idx="55"/>
-          </p:nvPr>
-        </p:nvSpPr>
-        <p:spPr/>
-        <p:txBody>
-          <a:bodyPr/>
-          <a:lstStyle/>
-          <a:p>
-            <a:endParaRPr lang="en-US"/>
-          </a:p>
-        </p:txBody>
-      </p:sp>
-      <p:sp>
-        <p:nvSpPr>
-          <p:cNvPr id="25" name="Picture Placeholder 24">
-            <a:extLst>
-              <a:ext uri="{FF2B5EF4-FFF2-40B4-BE49-F238E27FC236}">
-                <a16:creationId xmlns:a16="http://schemas.microsoft.com/office/drawing/2014/main" id="{17129FEE-6351-82F2-D285-F4BB28F638E9}"/>
-              </a:ext>
-            </a:extLst>
-          </p:cNvPr>
-          <p:cNvSpPr>
-            <a:spLocks noGrp="1"/>
-          </p:cNvSpPr>
-          <p:nvPr>
-            <p:ph type="pic" sz="quarter" idx="56"/>
-          </p:nvPr>
-        </p:nvSpPr>
-        <p:spPr/>
-        <p:txBody>
-          <a:bodyPr/>
-          <a:lstStyle/>
-          <a:p>
-            <a:endParaRPr lang="en-US"/>
-          </a:p>
-        </p:txBody>
-      </p:sp>
-      <p:sp>
-        <p:nvSpPr>
-          <p:cNvPr id="26" name="Picture Placeholder 25">
-            <a:extLst>
-              <a:ext uri="{FF2B5EF4-FFF2-40B4-BE49-F238E27FC236}">
-                <a16:creationId xmlns:a16="http://schemas.microsoft.com/office/drawing/2014/main" id="{153250C3-8DBF-CEF7-1990-24B6CCA2FE7F}"/>
-              </a:ext>
-            </a:extLst>
-          </p:cNvPr>
-          <p:cNvSpPr>
-            <a:spLocks noGrp="1"/>
-          </p:cNvSpPr>
-          <p:nvPr>
-            <p:ph type="pic" sz="quarter" idx="57"/>
-          </p:nvPr>
-        </p:nvSpPr>
-        <p:spPr/>
-        <p:txBody>
-          <a:bodyPr/>
-          <a:lstStyle/>
-          <a:p>
-            <a:endParaRPr lang="en-US"/>
-          </a:p>
-        </p:txBody>
-      </p:sp>
-      <p:sp>
-        <p:nvSpPr>
-          <p:cNvPr id="27" name="Picture Placeholder 26">
-            <a:extLst>
-              <a:ext uri="{FF2B5EF4-FFF2-40B4-BE49-F238E27FC236}">
-                <a16:creationId xmlns:a16="http://schemas.microsoft.com/office/drawing/2014/main" id="{2B0EA12A-4A4D-583C-8653-A27DC9026C24}"/>
-              </a:ext>
-            </a:extLst>
-          </p:cNvPr>
-          <p:cNvSpPr>
-            <a:spLocks noGrp="1"/>
-          </p:cNvSpPr>
-          <p:nvPr>
-            <p:ph type="pic" sz="quarter" idx="58"/>
           </p:nvPr>
         </p:nvSpPr>
         <p:spPr/>
@@ -8610,7 +8732,7 @@
         <a:srgbClr val="BCCB2A"/>
       </a:accent2>
       <a:accent3>
-        <a:srgbClr val="F58A1F"/>
+        <a:srgbClr val="9C4300"/>
       </a:accent3>
       <a:accent4>
         <a:srgbClr val="005D83"/>
